--- a/public/lessons/year-6-maths/summer/week-21/find-missing-terms/teaching-powerpoint-v1.pptx
+++ b/public/lessons/year-6-maths/summer/week-21/find-missing-terms/teaching-powerpoint-v1.pptx
@@ -2,24 +2,24 @@
 <file path=ppt/presentation.xml><?xml version="1.0" encoding="utf-8"?>
 <p:presentation xmlns:p="http://schemas.openxmlformats.org/presentationml/2006/main">
   <p:sldMasterIdLst>
-    <p:sldMasterId xmlns:r="http://schemas.openxmlformats.org/officeDocument/2006/relationships" id="2147483648" r:id="R96b86a241ac44c6a"/>
+    <p:sldMasterId xmlns:r="http://schemas.openxmlformats.org/officeDocument/2006/relationships" id="2147483648" r:id="R2fdbbeac5cfe4285"/>
   </p:sldMasterIdLst>
   <p:notesMasterIdLst>
-    <p:notesMasterId xmlns:r="http://schemas.openxmlformats.org/officeDocument/2006/relationships" r:id="Rc5a6203bb2af45d1"/>
+    <p:notesMasterId xmlns:r="http://schemas.openxmlformats.org/officeDocument/2006/relationships" r:id="Rc41e07c59927497d"/>
   </p:notesMasterIdLst>
   <p:sldIdLst>
-    <p:sldId xmlns:r="http://schemas.openxmlformats.org/officeDocument/2006/relationships" id="256" r:id="R968b97802ef3436c"/>
-    <p:sldId xmlns:r="http://schemas.openxmlformats.org/officeDocument/2006/relationships" id="257" r:id="R8f479513ee5149f0"/>
-    <p:sldId xmlns:r="http://schemas.openxmlformats.org/officeDocument/2006/relationships" id="258" r:id="Radb696fa01434293"/>
-    <p:sldId xmlns:r="http://schemas.openxmlformats.org/officeDocument/2006/relationships" id="259" r:id="Rd1d42bf809b14488"/>
-    <p:sldId xmlns:r="http://schemas.openxmlformats.org/officeDocument/2006/relationships" id="260" r:id="R1ebc247c60094216"/>
-    <p:sldId xmlns:r="http://schemas.openxmlformats.org/officeDocument/2006/relationships" id="261" r:id="Redeaa216bdd24376"/>
-    <p:sldId xmlns:r="http://schemas.openxmlformats.org/officeDocument/2006/relationships" id="262" r:id="R76248355d1a142dc"/>
-    <p:sldId xmlns:r="http://schemas.openxmlformats.org/officeDocument/2006/relationships" id="263" r:id="Rf1c24312fec74322"/>
-    <p:sldId xmlns:r="http://schemas.openxmlformats.org/officeDocument/2006/relationships" id="264" r:id="R66686c4b04c549a3"/>
-    <p:sldId xmlns:r="http://schemas.openxmlformats.org/officeDocument/2006/relationships" id="265" r:id="R11304720e7d74512"/>
-    <p:sldId xmlns:r="http://schemas.openxmlformats.org/officeDocument/2006/relationships" id="266" r:id="R010f4b2a200f43a1"/>
-    <p:sldId xmlns:r="http://schemas.openxmlformats.org/officeDocument/2006/relationships" id="267" r:id="R32489412cc474300"/>
+    <p:sldId xmlns:r="http://schemas.openxmlformats.org/officeDocument/2006/relationships" id="256" r:id="R7fc365e2ba6941fb"/>
+    <p:sldId xmlns:r="http://schemas.openxmlformats.org/officeDocument/2006/relationships" id="257" r:id="Rda9f8ff6e2f94ff9"/>
+    <p:sldId xmlns:r="http://schemas.openxmlformats.org/officeDocument/2006/relationships" id="258" r:id="R12cacac1cedb4b48"/>
+    <p:sldId xmlns:r="http://schemas.openxmlformats.org/officeDocument/2006/relationships" id="259" r:id="R852eca00c40b45a0"/>
+    <p:sldId xmlns:r="http://schemas.openxmlformats.org/officeDocument/2006/relationships" id="260" r:id="Re78274024a5742a8"/>
+    <p:sldId xmlns:r="http://schemas.openxmlformats.org/officeDocument/2006/relationships" id="261" r:id="R7775f4cad9be44ef"/>
+    <p:sldId xmlns:r="http://schemas.openxmlformats.org/officeDocument/2006/relationships" id="262" r:id="Rcc5e29d1b13b4a01"/>
+    <p:sldId xmlns:r="http://schemas.openxmlformats.org/officeDocument/2006/relationships" id="263" r:id="Rbdb61f81d6f644a3"/>
+    <p:sldId xmlns:r="http://schemas.openxmlformats.org/officeDocument/2006/relationships" id="264" r:id="R3fe36abe500d48dc"/>
+    <p:sldId xmlns:r="http://schemas.openxmlformats.org/officeDocument/2006/relationships" id="265" r:id="R61941ca4c3cb40a8"/>
+    <p:sldId xmlns:r="http://schemas.openxmlformats.org/officeDocument/2006/relationships" id="266" r:id="R4cefb66936bd4fb0"/>
+    <p:sldId xmlns:r="http://schemas.openxmlformats.org/officeDocument/2006/relationships" id="267" r:id="R657419867cd34919"/>
   </p:sldIdLst>
   <p:sldSz cx="12192000" cy="6858000"/>
   <p:notesSz cx="6858000" cy="9144000"/>
@@ -873,7 +873,7 @@
           <a:lstStyle xmlns:a="http://schemas.openxmlformats.org/drawingml/2006/main"/>
           <a:p xmlns:a="http://schemas.openxmlformats.org/drawingml/2006/main">
             <a:r>
-              <a:t>I do. Reveal the question, setup and each calculation stage one click at a time. Pupils watch before copying. Model answer: 73 and 51.</a:t>
+              <a:t>I do. Reveal the question, then reveal each mathematical change one click at a time. Point to the numbers and operation that changed before moving to the next line. Final answer: 73 and 51.</a:t>
             </a:r>
           </a:p>
         </p:txBody>
@@ -1291,7 +1291,7 @@
   </p:cSld>
   <p:clrMap bg1="lt1" tx1="dk1" bg2="lt2" tx2="dk2" accent1="accent1" accent2="accent2" accent3="accent3" accent4="accent4" accent5="accent5" accent6="accent6" hlink="hlink" folHlink="folHlink"/>
   <p:sldLayoutIdLst>
-    <p:sldLayoutId xmlns:r="http://schemas.openxmlformats.org/officeDocument/2006/relationships" id="2147483649" r:id="R17f7aabdaa724f7f"/>
+    <p:sldLayoutId xmlns:r="http://schemas.openxmlformats.org/officeDocument/2006/relationships" id="2147483649" r:id="Reaec89082a6c4ed4"/>
   </p:sldLayoutIdLst>
   <p:txStyles>
     <p:titleStyle>
@@ -1842,7 +1842,7 @@
           <p:cNvPr id="12" name="">
             <a:extLst xmlns:a="http://schemas.openxmlformats.org/drawingml/2006/main">
               <a:ext uri="{FF2B5EF4-FFF2-40B4-BE49-F238E27FC236}">
-                <a16:creationId xmlns:a16="http://schemas.microsoft.com/office/drawing/2014/main" id="{D9B43A71-97F0-4CCB-913F-D84491367C92}"/>
+                <a16:creationId xmlns:a16="http://schemas.microsoft.com/office/drawing/2014/main" id="{61C86EBD-AF57-43BF-8A1C-A941114AD0EB}"/>
               </a:ext>
             </a:extLst>
           </p:cNvPr>
@@ -1874,7 +1874,7 @@
           <p:cNvPr id="2" name="">
             <a:extLst xmlns:a="http://schemas.openxmlformats.org/drawingml/2006/main">
               <a:ext uri="{FF2B5EF4-FFF2-40B4-BE49-F238E27FC236}">
-                <a16:creationId xmlns:a16="http://schemas.microsoft.com/office/drawing/2014/main" id="{57C05B58-5432-4F58-AFAA-C5204D4F2480}"/>
+                <a16:creationId xmlns:a16="http://schemas.microsoft.com/office/drawing/2014/main" id="{A414731C-50D2-4B21-9CF2-C72C66A78E6A}"/>
               </a:ext>
             </a:extLst>
           </p:cNvPr>
@@ -1931,7 +1931,7 @@
           <p:cNvPr id="3" name="">
             <a:extLst xmlns:a="http://schemas.openxmlformats.org/drawingml/2006/main">
               <a:ext uri="{FF2B5EF4-FFF2-40B4-BE49-F238E27FC236}">
-                <a16:creationId xmlns:a16="http://schemas.microsoft.com/office/drawing/2014/main" id="{6DBCBCF6-DF5F-45FA-BCF7-A54B106CCF61}"/>
+                <a16:creationId xmlns:a16="http://schemas.microsoft.com/office/drawing/2014/main" id="{8256C572-E337-4DFA-88F7-41BCF26B5675}"/>
               </a:ext>
             </a:extLst>
           </p:cNvPr>
@@ -1965,7 +1965,7 @@
           <p:cNvPr id="4" name="">
             <a:extLst xmlns:a="http://schemas.openxmlformats.org/drawingml/2006/main">
               <a:ext uri="{FF2B5EF4-FFF2-40B4-BE49-F238E27FC236}">
-                <a16:creationId xmlns:a16="http://schemas.microsoft.com/office/drawing/2014/main" id="{81318F6E-5DB2-439C-8909-91BB86525611}"/>
+                <a16:creationId xmlns:a16="http://schemas.microsoft.com/office/drawing/2014/main" id="{AC4C8CC7-A000-4D80-AF22-83DF8D60DA64}"/>
               </a:ext>
             </a:extLst>
           </p:cNvPr>
@@ -2022,7 +2022,7 @@
           <p:cNvPr id="5" name="">
             <a:extLst xmlns:a="http://schemas.openxmlformats.org/drawingml/2006/main">
               <a:ext uri="{FF2B5EF4-FFF2-40B4-BE49-F238E27FC236}">
-                <a16:creationId xmlns:a16="http://schemas.microsoft.com/office/drawing/2014/main" id="{1DF3DE3D-E390-46FA-95E9-F768B8C82382}"/>
+                <a16:creationId xmlns:a16="http://schemas.microsoft.com/office/drawing/2014/main" id="{10BE0748-82EC-44A5-8941-D33B78E639E0}"/>
               </a:ext>
             </a:extLst>
           </p:cNvPr>
@@ -2079,7 +2079,7 @@
           <p:cNvPr id="6" name="">
             <a:extLst xmlns:a="http://schemas.openxmlformats.org/drawingml/2006/main">
               <a:ext uri="{FF2B5EF4-FFF2-40B4-BE49-F238E27FC236}">
-                <a16:creationId xmlns:a16="http://schemas.microsoft.com/office/drawing/2014/main" id="{F4268256-D18C-4618-80ED-3F1AF55F9630}"/>
+                <a16:creationId xmlns:a16="http://schemas.microsoft.com/office/drawing/2014/main" id="{BC183B25-C6FE-4B53-9E97-C786CA273F7B}"/>
               </a:ext>
             </a:extLst>
           </p:cNvPr>
@@ -2113,7 +2113,7 @@
           <p:cNvPr id="7" name="">
             <a:extLst xmlns:a="http://schemas.openxmlformats.org/drawingml/2006/main">
               <a:ext uri="{FF2B5EF4-FFF2-40B4-BE49-F238E27FC236}">
-                <a16:creationId xmlns:a16="http://schemas.microsoft.com/office/drawing/2014/main" id="{5CE3EFF4-6F73-4154-9759-2326B82ECE6A}"/>
+                <a16:creationId xmlns:a16="http://schemas.microsoft.com/office/drawing/2014/main" id="{C819E681-FE66-4606-B4B7-C734854071E5}"/>
               </a:ext>
             </a:extLst>
           </p:cNvPr>
@@ -2170,7 +2170,7 @@
           <p:cNvPr id="8" name="">
             <a:extLst xmlns:a="http://schemas.openxmlformats.org/drawingml/2006/main">
               <a:ext uri="{FF2B5EF4-FFF2-40B4-BE49-F238E27FC236}">
-                <a16:creationId xmlns:a16="http://schemas.microsoft.com/office/drawing/2014/main" id="{F8A1D3EA-4154-40AA-B63F-E78354A716B0}"/>
+                <a16:creationId xmlns:a16="http://schemas.microsoft.com/office/drawing/2014/main" id="{1CF9A707-55FE-4BD2-A34C-D706885B50BE}"/>
               </a:ext>
             </a:extLst>
           </p:cNvPr>
@@ -2227,7 +2227,7 @@
           <p:cNvPr id="9" name="">
             <a:extLst xmlns:a="http://schemas.openxmlformats.org/drawingml/2006/main">
               <a:ext uri="{FF2B5EF4-FFF2-40B4-BE49-F238E27FC236}">
-                <a16:creationId xmlns:a16="http://schemas.microsoft.com/office/drawing/2014/main" id="{5522AC98-6110-4C6D-BFB9-3A3060496FD5}"/>
+                <a16:creationId xmlns:a16="http://schemas.microsoft.com/office/drawing/2014/main" id="{C5FE82E5-86A9-46CF-BADD-90B4A794F57E}"/>
               </a:ext>
             </a:extLst>
           </p:cNvPr>
@@ -2284,7 +2284,7 @@
           <p:cNvPr id="10" name="">
             <a:extLst xmlns:a="http://schemas.openxmlformats.org/drawingml/2006/main">
               <a:ext uri="{FF2B5EF4-FFF2-40B4-BE49-F238E27FC236}">
-                <a16:creationId xmlns:a16="http://schemas.microsoft.com/office/drawing/2014/main" id="{CEB7F992-B678-4FC1-8035-7E22F7CFD579}"/>
+                <a16:creationId xmlns:a16="http://schemas.microsoft.com/office/drawing/2014/main" id="{BDAD9ACE-1B29-47B6-B9B3-4958D9DE916E}"/>
               </a:ext>
             </a:extLst>
           </p:cNvPr>
@@ -2341,7 +2341,7 @@
           <p:cNvPr id="11" name="">
             <a:extLst xmlns:a="http://schemas.openxmlformats.org/drawingml/2006/main">
               <a:ext uri="{FF2B5EF4-FFF2-40B4-BE49-F238E27FC236}">
-                <a16:creationId xmlns:a16="http://schemas.microsoft.com/office/drawing/2014/main" id="{538E9703-321C-4005-A92F-ECCEAEAD2ADC}"/>
+                <a16:creationId xmlns:a16="http://schemas.microsoft.com/office/drawing/2014/main" id="{2249224E-69D7-4D38-B962-14450B425474}"/>
               </a:ext>
             </a:extLst>
           </p:cNvPr>
@@ -2396,7 +2396,7 @@
     </p:spTree>
     <p:extLst>
       <p:ext uri="{BB962C8B-B14F-4D97-AF65-F5344CB8AC3E}">
-        <p14:creationId xmlns:p14="http://schemas.microsoft.com/office/powerpoint/2010/main" val="560452872"/>
+        <p14:creationId xmlns:p14="http://schemas.microsoft.com/office/powerpoint/2010/main" val="84987649"/>
       </p:ext>
     </p:extLst>
   </p:cSld>
@@ -2427,7 +2427,7 @@
           <p:cNvPr id="14" name="">
             <a:extLst xmlns:a="http://schemas.openxmlformats.org/drawingml/2006/main">
               <a:ext uri="{FF2B5EF4-FFF2-40B4-BE49-F238E27FC236}">
-                <a16:creationId xmlns:a16="http://schemas.microsoft.com/office/drawing/2014/main" id="{883FFF21-8FA9-4D04-8714-335C5567BCA3}"/>
+                <a16:creationId xmlns:a16="http://schemas.microsoft.com/office/drawing/2014/main" id="{EC539997-EC6E-4E14-B210-3E027F140040}"/>
               </a:ext>
             </a:extLst>
           </p:cNvPr>
@@ -2459,7 +2459,7 @@
           <p:cNvPr id="2" name="">
             <a:extLst xmlns:a="http://schemas.openxmlformats.org/drawingml/2006/main">
               <a:ext uri="{FF2B5EF4-FFF2-40B4-BE49-F238E27FC236}">
-                <a16:creationId xmlns:a16="http://schemas.microsoft.com/office/drawing/2014/main" id="{1954044F-DC3F-4DBB-9A54-8041312E6289}"/>
+                <a16:creationId xmlns:a16="http://schemas.microsoft.com/office/drawing/2014/main" id="{31D54579-A582-4DFB-A12F-61190A90DED5}"/>
               </a:ext>
             </a:extLst>
           </p:cNvPr>
@@ -2516,7 +2516,7 @@
           <p:cNvPr id="3" name="">
             <a:extLst xmlns:a="http://schemas.openxmlformats.org/drawingml/2006/main">
               <a:ext uri="{FF2B5EF4-FFF2-40B4-BE49-F238E27FC236}">
-                <a16:creationId xmlns:a16="http://schemas.microsoft.com/office/drawing/2014/main" id="{55ACAAE8-EBA0-48C2-BDD8-470DD35814EA}"/>
+                <a16:creationId xmlns:a16="http://schemas.microsoft.com/office/drawing/2014/main" id="{F23DF4C0-0500-4C60-8EB4-D5F121188D1E}"/>
               </a:ext>
             </a:extLst>
           </p:cNvPr>
@@ -2548,7 +2548,7 @@
           <p:cNvPr id="4" name="">
             <a:extLst xmlns:a="http://schemas.openxmlformats.org/drawingml/2006/main">
               <a:ext uri="{FF2B5EF4-FFF2-40B4-BE49-F238E27FC236}">
-                <a16:creationId xmlns:a16="http://schemas.microsoft.com/office/drawing/2014/main" id="{CFD9B842-13C1-44D2-83D8-88ED77DD5F1D}"/>
+                <a16:creationId xmlns:a16="http://schemas.microsoft.com/office/drawing/2014/main" id="{75D4551A-BBD8-4F1C-A4C2-195BCCA73CBF}"/>
               </a:ext>
             </a:extLst>
           </p:cNvPr>
@@ -2605,7 +2605,7 @@
           <p:cNvPr id="5" name="">
             <a:extLst xmlns:a="http://schemas.openxmlformats.org/drawingml/2006/main">
               <a:ext uri="{FF2B5EF4-FFF2-40B4-BE49-F238E27FC236}">
-                <a16:creationId xmlns:a16="http://schemas.microsoft.com/office/drawing/2014/main" id="{AA0A63DB-6F08-4ED4-AF34-501C3649FF32}"/>
+                <a16:creationId xmlns:a16="http://schemas.microsoft.com/office/drawing/2014/main" id="{0466A33B-9412-4B90-ABA2-AEB5D39254C0}"/>
               </a:ext>
             </a:extLst>
           </p:cNvPr>
@@ -2662,7 +2662,7 @@
           <p:cNvPr id="6" name="">
             <a:extLst xmlns:a="http://schemas.openxmlformats.org/drawingml/2006/main">
               <a:ext uri="{FF2B5EF4-FFF2-40B4-BE49-F238E27FC236}">
-                <a16:creationId xmlns:a16="http://schemas.microsoft.com/office/drawing/2014/main" id="{E795EA2A-AA04-4DD0-B5DE-054DB9D3141B}"/>
+                <a16:creationId xmlns:a16="http://schemas.microsoft.com/office/drawing/2014/main" id="{625D6939-5632-49ED-8357-5DA6C87B339D}"/>
               </a:ext>
             </a:extLst>
           </p:cNvPr>
@@ -2719,7 +2719,7 @@
           <p:cNvPr id="7" name="">
             <a:extLst xmlns:a="http://schemas.openxmlformats.org/drawingml/2006/main">
               <a:ext uri="{FF2B5EF4-FFF2-40B4-BE49-F238E27FC236}">
-                <a16:creationId xmlns:a16="http://schemas.microsoft.com/office/drawing/2014/main" id="{E7D51BFC-EEA5-498D-9EAA-D877AD93AAA9}"/>
+                <a16:creationId xmlns:a16="http://schemas.microsoft.com/office/drawing/2014/main" id="{5778C0D7-948E-486C-963E-54BE1BE02189}"/>
               </a:ext>
             </a:extLst>
           </p:cNvPr>
@@ -2751,7 +2751,7 @@
           <p:cNvPr id="8" name="">
             <a:extLst xmlns:a="http://schemas.openxmlformats.org/drawingml/2006/main">
               <a:ext uri="{FF2B5EF4-FFF2-40B4-BE49-F238E27FC236}">
-                <a16:creationId xmlns:a16="http://schemas.microsoft.com/office/drawing/2014/main" id="{C1D86025-9110-4A73-AB14-50C8700CF197}"/>
+                <a16:creationId xmlns:a16="http://schemas.microsoft.com/office/drawing/2014/main" id="{1ACD2CD0-D0CB-487F-A656-EEA39C5BC117}"/>
               </a:ext>
             </a:extLst>
           </p:cNvPr>
@@ -2808,7 +2808,7 @@
           <p:cNvPr id="9" name="">
             <a:extLst xmlns:a="http://schemas.openxmlformats.org/drawingml/2006/main">
               <a:ext uri="{FF2B5EF4-FFF2-40B4-BE49-F238E27FC236}">
-                <a16:creationId xmlns:a16="http://schemas.microsoft.com/office/drawing/2014/main" id="{641BBFF1-9078-41F3-BC93-9581C1F3D81C}"/>
+                <a16:creationId xmlns:a16="http://schemas.microsoft.com/office/drawing/2014/main" id="{6180A6EA-CC37-410A-8E8C-51EE7F17DF5F}"/>
               </a:ext>
             </a:extLst>
           </p:cNvPr>
@@ -2865,7 +2865,7 @@
           <p:cNvPr id="10" name="">
             <a:extLst xmlns:a="http://schemas.openxmlformats.org/drawingml/2006/main">
               <a:ext uri="{FF2B5EF4-FFF2-40B4-BE49-F238E27FC236}">
-                <a16:creationId xmlns:a16="http://schemas.microsoft.com/office/drawing/2014/main" id="{B4C2B7DC-EA38-438A-90EA-58EDC20A95C0}"/>
+                <a16:creationId xmlns:a16="http://schemas.microsoft.com/office/drawing/2014/main" id="{A3898D00-0300-4260-88A0-CACA45DAD80B}"/>
               </a:ext>
             </a:extLst>
           </p:cNvPr>
@@ -2922,7 +2922,7 @@
           <p:cNvPr id="11" name="">
             <a:extLst xmlns:a="http://schemas.openxmlformats.org/drawingml/2006/main">
               <a:ext uri="{FF2B5EF4-FFF2-40B4-BE49-F238E27FC236}">
-                <a16:creationId xmlns:a16="http://schemas.microsoft.com/office/drawing/2014/main" id="{66193C95-E9CD-4C1C-AC15-989AE37A68BF}"/>
+                <a16:creationId xmlns:a16="http://schemas.microsoft.com/office/drawing/2014/main" id="{752714BE-F9D1-40FD-AE4A-C2DED60583D1}"/>
               </a:ext>
             </a:extLst>
           </p:cNvPr>
@@ -2979,7 +2979,7 @@
           <p:cNvPr id="12" name="">
             <a:extLst xmlns:a="http://schemas.openxmlformats.org/drawingml/2006/main">
               <a:ext uri="{FF2B5EF4-FFF2-40B4-BE49-F238E27FC236}">
-                <a16:creationId xmlns:a16="http://schemas.microsoft.com/office/drawing/2014/main" id="{6304DF4A-AAD8-4847-90BB-6327AC89F855}"/>
+                <a16:creationId xmlns:a16="http://schemas.microsoft.com/office/drawing/2014/main" id="{6F0BE89B-42FF-4197-8AED-D60CA11937DB}"/>
               </a:ext>
             </a:extLst>
           </p:cNvPr>
@@ -3036,7 +3036,7 @@
           <p:cNvPr id="13" name="">
             <a:extLst xmlns:a="http://schemas.openxmlformats.org/drawingml/2006/main">
               <a:ext uri="{FF2B5EF4-FFF2-40B4-BE49-F238E27FC236}">
-                <a16:creationId xmlns:a16="http://schemas.microsoft.com/office/drawing/2014/main" id="{21578C67-91ED-4C88-9EBA-9EF507DCB70D}"/>
+                <a16:creationId xmlns:a16="http://schemas.microsoft.com/office/drawing/2014/main" id="{688719DE-C937-4E30-9C30-86A4285B1B33}"/>
               </a:ext>
             </a:extLst>
           </p:cNvPr>
@@ -3091,7 +3091,7 @@
     </p:spTree>
     <p:extLst>
       <p:ext uri="{BB962C8B-B14F-4D97-AF65-F5344CB8AC3E}">
-        <p14:creationId xmlns:p14="http://schemas.microsoft.com/office/powerpoint/2010/main" val="1577312389"/>
+        <p14:creationId xmlns:p14="http://schemas.microsoft.com/office/powerpoint/2010/main" val="1403888230"/>
       </p:ext>
     </p:extLst>
   </p:cSld>
@@ -3292,7 +3292,7 @@
           <p:cNvPr id="19" name="">
             <a:extLst xmlns:a="http://schemas.openxmlformats.org/drawingml/2006/main">
               <a:ext uri="{FF2B5EF4-FFF2-40B4-BE49-F238E27FC236}">
-                <a16:creationId xmlns:a16="http://schemas.microsoft.com/office/drawing/2014/main" id="{D923E604-E96F-4BE3-8455-774054FF641E}"/>
+                <a16:creationId xmlns:a16="http://schemas.microsoft.com/office/drawing/2014/main" id="{2D2C971A-D94C-470A-B611-AD8C216F6BF9}"/>
               </a:ext>
             </a:extLst>
           </p:cNvPr>
@@ -3324,7 +3324,7 @@
           <p:cNvPr id="2" name="">
             <a:extLst xmlns:a="http://schemas.openxmlformats.org/drawingml/2006/main">
               <a:ext uri="{FF2B5EF4-FFF2-40B4-BE49-F238E27FC236}">
-                <a16:creationId xmlns:a16="http://schemas.microsoft.com/office/drawing/2014/main" id="{87069EF8-D42F-4FAC-A03F-DB8B99EC44C3}"/>
+                <a16:creationId xmlns:a16="http://schemas.microsoft.com/office/drawing/2014/main" id="{49B0FB4C-D2AA-4982-AC0F-783CD0A21F44}"/>
               </a:ext>
             </a:extLst>
           </p:cNvPr>
@@ -3381,7 +3381,7 @@
           <p:cNvPr id="3" name="">
             <a:extLst xmlns:a="http://schemas.openxmlformats.org/drawingml/2006/main">
               <a:ext uri="{FF2B5EF4-FFF2-40B4-BE49-F238E27FC236}">
-                <a16:creationId xmlns:a16="http://schemas.microsoft.com/office/drawing/2014/main" id="{6D6D7DBF-5D7D-4935-833B-8B3AC09A8007}"/>
+                <a16:creationId xmlns:a16="http://schemas.microsoft.com/office/drawing/2014/main" id="{9D5634B9-95DD-46F9-8C95-DC0FE4D5E1FC}"/>
               </a:ext>
             </a:extLst>
           </p:cNvPr>
@@ -3413,7 +3413,7 @@
           <p:cNvPr id="4" name="">
             <a:extLst xmlns:a="http://schemas.openxmlformats.org/drawingml/2006/main">
               <a:ext uri="{FF2B5EF4-FFF2-40B4-BE49-F238E27FC236}">
-                <a16:creationId xmlns:a16="http://schemas.microsoft.com/office/drawing/2014/main" id="{71A37141-CE8E-43C1-92F2-E4FD15B3F18A}"/>
+                <a16:creationId xmlns:a16="http://schemas.microsoft.com/office/drawing/2014/main" id="{950AE5EE-6018-49F5-A0E1-A51327D9A18B}"/>
               </a:ext>
             </a:extLst>
           </p:cNvPr>
@@ -3470,7 +3470,7 @@
           <p:cNvPr id="5" name="">
             <a:extLst xmlns:a="http://schemas.openxmlformats.org/drawingml/2006/main">
               <a:ext uri="{FF2B5EF4-FFF2-40B4-BE49-F238E27FC236}">
-                <a16:creationId xmlns:a16="http://schemas.microsoft.com/office/drawing/2014/main" id="{1F6C361C-7421-43FD-96D9-7B27CDE0C741}"/>
+                <a16:creationId xmlns:a16="http://schemas.microsoft.com/office/drawing/2014/main" id="{F8F63B0D-D336-42CD-B2B1-2DF9FDD7F536}"/>
               </a:ext>
             </a:extLst>
           </p:cNvPr>
@@ -3527,7 +3527,7 @@
           <p:cNvPr id="6" name="">
             <a:extLst xmlns:a="http://schemas.openxmlformats.org/drawingml/2006/main">
               <a:ext uri="{FF2B5EF4-FFF2-40B4-BE49-F238E27FC236}">
-                <a16:creationId xmlns:a16="http://schemas.microsoft.com/office/drawing/2014/main" id="{19A6EBA5-805E-4B23-8E22-CC499CF80F50}"/>
+                <a16:creationId xmlns:a16="http://schemas.microsoft.com/office/drawing/2014/main" id="{036AD9F1-B984-480D-9DDB-778AFFAF7823}"/>
               </a:ext>
             </a:extLst>
           </p:cNvPr>
@@ -3584,7 +3584,7 @@
           <p:cNvPr id="7" name="">
             <a:extLst xmlns:a="http://schemas.openxmlformats.org/drawingml/2006/main">
               <a:ext uri="{FF2B5EF4-FFF2-40B4-BE49-F238E27FC236}">
-                <a16:creationId xmlns:a16="http://schemas.microsoft.com/office/drawing/2014/main" id="{342AF4E2-322A-4317-8449-2D45BFD2D30E}"/>
+                <a16:creationId xmlns:a16="http://schemas.microsoft.com/office/drawing/2014/main" id="{EBE2C50B-9152-4C6B-A2FE-DBF181D9C351}"/>
               </a:ext>
             </a:extLst>
           </p:cNvPr>
@@ -3616,7 +3616,7 @@
           <p:cNvPr id="8" name="">
             <a:extLst xmlns:a="http://schemas.openxmlformats.org/drawingml/2006/main">
               <a:ext uri="{FF2B5EF4-FFF2-40B4-BE49-F238E27FC236}">
-                <a16:creationId xmlns:a16="http://schemas.microsoft.com/office/drawing/2014/main" id="{96008068-9CAB-4375-A876-8BE1813C9193}"/>
+                <a16:creationId xmlns:a16="http://schemas.microsoft.com/office/drawing/2014/main" id="{A022EDAD-84AC-411D-AD3C-486F930C9523}"/>
               </a:ext>
             </a:extLst>
           </p:cNvPr>
@@ -3673,7 +3673,7 @@
           <p:cNvPr id="9" name="">
             <a:extLst xmlns:a="http://schemas.openxmlformats.org/drawingml/2006/main">
               <a:ext uri="{FF2B5EF4-FFF2-40B4-BE49-F238E27FC236}">
-                <a16:creationId xmlns:a16="http://schemas.microsoft.com/office/drawing/2014/main" id="{608A845F-C025-43E4-878D-F4546ED500AD}"/>
+                <a16:creationId xmlns:a16="http://schemas.microsoft.com/office/drawing/2014/main" id="{31B657AF-ED23-4638-82B6-1EA0103F78FA}"/>
               </a:ext>
             </a:extLst>
           </p:cNvPr>
@@ -3730,7 +3730,7 @@
           <p:cNvPr id="10" name="">
             <a:extLst xmlns:a="http://schemas.openxmlformats.org/drawingml/2006/main">
               <a:ext uri="{FF2B5EF4-FFF2-40B4-BE49-F238E27FC236}">
-                <a16:creationId xmlns:a16="http://schemas.microsoft.com/office/drawing/2014/main" id="{C75BB963-8E49-4D94-B859-3D7669AAC7FE}"/>
+                <a16:creationId xmlns:a16="http://schemas.microsoft.com/office/drawing/2014/main" id="{6FFA037F-3712-4313-8EE3-F3353FD5215C}"/>
               </a:ext>
             </a:extLst>
           </p:cNvPr>
@@ -3787,7 +3787,7 @@
           <p:cNvPr id="11" name="">
             <a:extLst xmlns:a="http://schemas.openxmlformats.org/drawingml/2006/main">
               <a:ext uri="{FF2B5EF4-FFF2-40B4-BE49-F238E27FC236}">
-                <a16:creationId xmlns:a16="http://schemas.microsoft.com/office/drawing/2014/main" id="{FEF5157C-0D7D-47F6-A831-AC67071CB4D0}"/>
+                <a16:creationId xmlns:a16="http://schemas.microsoft.com/office/drawing/2014/main" id="{74AC5588-5EA2-47C4-9C7A-86EEDDB941BE}"/>
               </a:ext>
             </a:extLst>
           </p:cNvPr>
@@ -3821,7 +3821,7 @@
           <p:cNvPr id="12" name="">
             <a:extLst xmlns:a="http://schemas.openxmlformats.org/drawingml/2006/main">
               <a:ext uri="{FF2B5EF4-FFF2-40B4-BE49-F238E27FC236}">
-                <a16:creationId xmlns:a16="http://schemas.microsoft.com/office/drawing/2014/main" id="{85ED5B06-0ABF-4D3A-95CA-3D3454F9E907}"/>
+                <a16:creationId xmlns:a16="http://schemas.microsoft.com/office/drawing/2014/main" id="{0E7E5885-C769-4C43-B034-B68C7D73ACD6}"/>
               </a:ext>
             </a:extLst>
           </p:cNvPr>
@@ -3878,7 +3878,7 @@
           <p:cNvPr id="13" name="">
             <a:extLst xmlns:a="http://schemas.openxmlformats.org/drawingml/2006/main">
               <a:ext uri="{FF2B5EF4-FFF2-40B4-BE49-F238E27FC236}">
-                <a16:creationId xmlns:a16="http://schemas.microsoft.com/office/drawing/2014/main" id="{0273ABDC-CE2A-4A19-A330-FC1ADEB474EF}"/>
+                <a16:creationId xmlns:a16="http://schemas.microsoft.com/office/drawing/2014/main" id="{B2092E25-6F75-4FE8-BEF9-DAAD9564AA91}"/>
               </a:ext>
             </a:extLst>
           </p:cNvPr>
@@ -3935,7 +3935,7 @@
           <p:cNvPr id="14" name="">
             <a:extLst xmlns:a="http://schemas.openxmlformats.org/drawingml/2006/main">
               <a:ext uri="{FF2B5EF4-FFF2-40B4-BE49-F238E27FC236}">
-                <a16:creationId xmlns:a16="http://schemas.microsoft.com/office/drawing/2014/main" id="{F7B6BB76-9552-4510-AF3A-78ACB449FD8E}"/>
+                <a16:creationId xmlns:a16="http://schemas.microsoft.com/office/drawing/2014/main" id="{F629AD09-DDC6-4FEC-BA7C-188566581914}"/>
               </a:ext>
             </a:extLst>
           </p:cNvPr>
@@ -3992,7 +3992,7 @@
           <p:cNvPr id="15" name="">
             <a:extLst xmlns:a="http://schemas.openxmlformats.org/drawingml/2006/main">
               <a:ext uri="{FF2B5EF4-FFF2-40B4-BE49-F238E27FC236}">
-                <a16:creationId xmlns:a16="http://schemas.microsoft.com/office/drawing/2014/main" id="{2CFEF0CD-8597-41D2-93AB-463D34CD71E3}"/>
+                <a16:creationId xmlns:a16="http://schemas.microsoft.com/office/drawing/2014/main" id="{FB09BA84-2C8A-4EBE-A185-E96ED92083FE}"/>
               </a:ext>
             </a:extLst>
           </p:cNvPr>
@@ -4026,7 +4026,7 @@
           <p:cNvPr id="16" name="">
             <a:extLst xmlns:a="http://schemas.openxmlformats.org/drawingml/2006/main">
               <a:ext uri="{FF2B5EF4-FFF2-40B4-BE49-F238E27FC236}">
-                <a16:creationId xmlns:a16="http://schemas.microsoft.com/office/drawing/2014/main" id="{6F719211-4E15-471F-BF00-FFD8DF4478BB}"/>
+                <a16:creationId xmlns:a16="http://schemas.microsoft.com/office/drawing/2014/main" id="{571D6725-E8D0-43E6-B950-4A1FA5768CAD}"/>
               </a:ext>
             </a:extLst>
           </p:cNvPr>
@@ -4083,7 +4083,7 @@
           <p:cNvPr id="17" name="">
             <a:extLst xmlns:a="http://schemas.openxmlformats.org/drawingml/2006/main">
               <a:ext uri="{FF2B5EF4-FFF2-40B4-BE49-F238E27FC236}">
-                <a16:creationId xmlns:a16="http://schemas.microsoft.com/office/drawing/2014/main" id="{BD05D28C-3B7D-4C5D-A3FB-B62984725890}"/>
+                <a16:creationId xmlns:a16="http://schemas.microsoft.com/office/drawing/2014/main" id="{A37B78F0-BC04-4CF0-9081-953744FE7F6E}"/>
               </a:ext>
             </a:extLst>
           </p:cNvPr>
@@ -4140,7 +4140,7 @@
           <p:cNvPr id="18" name="">
             <a:extLst xmlns:a="http://schemas.openxmlformats.org/drawingml/2006/main">
               <a:ext uri="{FF2B5EF4-FFF2-40B4-BE49-F238E27FC236}">
-                <a16:creationId xmlns:a16="http://schemas.microsoft.com/office/drawing/2014/main" id="{A3D350E7-1A6D-41F8-831F-29059D29E7D3}"/>
+                <a16:creationId xmlns:a16="http://schemas.microsoft.com/office/drawing/2014/main" id="{08B4FBF2-2E60-49B3-8E26-9B588F403E94}"/>
               </a:ext>
             </a:extLst>
           </p:cNvPr>
@@ -4195,7 +4195,7 @@
     </p:spTree>
     <p:extLst>
       <p:ext uri="{BB962C8B-B14F-4D97-AF65-F5344CB8AC3E}">
-        <p14:creationId xmlns:p14="http://schemas.microsoft.com/office/powerpoint/2010/main" val="217007724"/>
+        <p14:creationId xmlns:p14="http://schemas.microsoft.com/office/powerpoint/2010/main" val="201745161"/>
       </p:ext>
     </p:extLst>
   </p:cSld>
@@ -4350,7 +4350,7 @@
           <p:cNvPr id="23" name="">
             <a:extLst xmlns:a="http://schemas.openxmlformats.org/drawingml/2006/main">
               <a:ext uri="{FF2B5EF4-FFF2-40B4-BE49-F238E27FC236}">
-                <a16:creationId xmlns:a16="http://schemas.microsoft.com/office/drawing/2014/main" id="{511E47C5-9B32-454C-A0CD-72BC8334195C}"/>
+                <a16:creationId xmlns:a16="http://schemas.microsoft.com/office/drawing/2014/main" id="{6B91C683-6698-4444-BB40-3F6DD1C05F97}"/>
               </a:ext>
             </a:extLst>
           </p:cNvPr>
@@ -4382,7 +4382,7 @@
           <p:cNvPr id="2" name="">
             <a:extLst xmlns:a="http://schemas.openxmlformats.org/drawingml/2006/main">
               <a:ext uri="{FF2B5EF4-FFF2-40B4-BE49-F238E27FC236}">
-                <a16:creationId xmlns:a16="http://schemas.microsoft.com/office/drawing/2014/main" id="{CA8A518E-ACF2-49A0-A7A8-1B9BA0B91744}"/>
+                <a16:creationId xmlns:a16="http://schemas.microsoft.com/office/drawing/2014/main" id="{67A1272D-D73D-4B6A-88B9-4341867F6B9D}"/>
               </a:ext>
             </a:extLst>
           </p:cNvPr>
@@ -4439,7 +4439,7 @@
           <p:cNvPr id="3" name="">
             <a:extLst xmlns:a="http://schemas.openxmlformats.org/drawingml/2006/main">
               <a:ext uri="{FF2B5EF4-FFF2-40B4-BE49-F238E27FC236}">
-                <a16:creationId xmlns:a16="http://schemas.microsoft.com/office/drawing/2014/main" id="{F250E67F-9583-4DFD-B10B-EF0A8BF5BE26}"/>
+                <a16:creationId xmlns:a16="http://schemas.microsoft.com/office/drawing/2014/main" id="{6C8CF103-4880-4E29-935E-EFC2A02A31B3}"/>
               </a:ext>
             </a:extLst>
           </p:cNvPr>
@@ -4471,7 +4471,7 @@
           <p:cNvPr id="4" name="">
             <a:extLst xmlns:a="http://schemas.openxmlformats.org/drawingml/2006/main">
               <a:ext uri="{FF2B5EF4-FFF2-40B4-BE49-F238E27FC236}">
-                <a16:creationId xmlns:a16="http://schemas.microsoft.com/office/drawing/2014/main" id="{CB98641C-40F2-4974-9F3D-8AB23E2F9D6B}"/>
+                <a16:creationId xmlns:a16="http://schemas.microsoft.com/office/drawing/2014/main" id="{74CE64D9-1F5A-4108-8539-B01EF87B6022}"/>
               </a:ext>
             </a:extLst>
           </p:cNvPr>
@@ -4528,7 +4528,7 @@
           <p:cNvPr id="5" name="">
             <a:extLst xmlns:a="http://schemas.openxmlformats.org/drawingml/2006/main">
               <a:ext uri="{FF2B5EF4-FFF2-40B4-BE49-F238E27FC236}">
-                <a16:creationId xmlns:a16="http://schemas.microsoft.com/office/drawing/2014/main" id="{E71F9FD6-D268-4750-89C0-7E1EAD7AB816}"/>
+                <a16:creationId xmlns:a16="http://schemas.microsoft.com/office/drawing/2014/main" id="{28D263D6-EB05-4ABD-81CA-5D152AE060A5}"/>
               </a:ext>
             </a:extLst>
           </p:cNvPr>
@@ -4585,7 +4585,7 @@
           <p:cNvPr id="6" name="">
             <a:extLst xmlns:a="http://schemas.openxmlformats.org/drawingml/2006/main">
               <a:ext uri="{FF2B5EF4-FFF2-40B4-BE49-F238E27FC236}">
-                <a16:creationId xmlns:a16="http://schemas.microsoft.com/office/drawing/2014/main" id="{EFFEEE08-832B-482E-8EDD-95D199F0BA45}"/>
+                <a16:creationId xmlns:a16="http://schemas.microsoft.com/office/drawing/2014/main" id="{2F270F55-0E89-4F02-8A02-2DFD88ABC970}"/>
               </a:ext>
             </a:extLst>
           </p:cNvPr>
@@ -4642,7 +4642,7 @@
           <p:cNvPr id="7" name="">
             <a:extLst xmlns:a="http://schemas.openxmlformats.org/drawingml/2006/main">
               <a:ext uri="{FF2B5EF4-FFF2-40B4-BE49-F238E27FC236}">
-                <a16:creationId xmlns:a16="http://schemas.microsoft.com/office/drawing/2014/main" id="{AFB1B14B-951D-4EFC-A09C-F7AA56078065}"/>
+                <a16:creationId xmlns:a16="http://schemas.microsoft.com/office/drawing/2014/main" id="{D0CBC1B3-1DD2-4D17-AD6C-C82B191ADF8B}"/>
               </a:ext>
             </a:extLst>
           </p:cNvPr>
@@ -4674,7 +4674,7 @@
           <p:cNvPr id="8" name="">
             <a:extLst xmlns:a="http://schemas.openxmlformats.org/drawingml/2006/main">
               <a:ext uri="{FF2B5EF4-FFF2-40B4-BE49-F238E27FC236}">
-                <a16:creationId xmlns:a16="http://schemas.microsoft.com/office/drawing/2014/main" id="{F708792B-96B7-4DE9-9F4A-9E9370EB4971}"/>
+                <a16:creationId xmlns:a16="http://schemas.microsoft.com/office/drawing/2014/main" id="{429853F2-C831-41C2-93DF-690413FA95F8}"/>
               </a:ext>
             </a:extLst>
           </p:cNvPr>
@@ -4731,7 +4731,7 @@
           <p:cNvPr id="9" name="">
             <a:extLst xmlns:a="http://schemas.openxmlformats.org/drawingml/2006/main">
               <a:ext uri="{FF2B5EF4-FFF2-40B4-BE49-F238E27FC236}">
-                <a16:creationId xmlns:a16="http://schemas.microsoft.com/office/drawing/2014/main" id="{9AA5DA57-F51C-4820-9D4B-D7E4658A85B7}"/>
+                <a16:creationId xmlns:a16="http://schemas.microsoft.com/office/drawing/2014/main" id="{BA0FC114-49E1-4324-AB48-3FFD2C546698}"/>
               </a:ext>
             </a:extLst>
           </p:cNvPr>
@@ -4788,7 +4788,7 @@
           <p:cNvPr id="10" name="">
             <a:extLst xmlns:a="http://schemas.openxmlformats.org/drawingml/2006/main">
               <a:ext uri="{FF2B5EF4-FFF2-40B4-BE49-F238E27FC236}">
-                <a16:creationId xmlns:a16="http://schemas.microsoft.com/office/drawing/2014/main" id="{07FF5896-76B1-4347-83A1-EFA866B6070E}"/>
+                <a16:creationId xmlns:a16="http://schemas.microsoft.com/office/drawing/2014/main" id="{88C49C8F-85F5-4B0B-9540-ADAAD9AC68E0}"/>
               </a:ext>
             </a:extLst>
           </p:cNvPr>
@@ -4822,7 +4822,7 @@
           <p:cNvPr id="11" name="">
             <a:extLst xmlns:a="http://schemas.openxmlformats.org/drawingml/2006/main">
               <a:ext uri="{FF2B5EF4-FFF2-40B4-BE49-F238E27FC236}">
-                <a16:creationId xmlns:a16="http://schemas.microsoft.com/office/drawing/2014/main" id="{08BE4D40-33D5-46B8-8C1B-8E1F0BBB5FB3}"/>
+                <a16:creationId xmlns:a16="http://schemas.microsoft.com/office/drawing/2014/main" id="{305DEDBF-9C94-4DB5-A43E-40A093FD81C7}"/>
               </a:ext>
             </a:extLst>
           </p:cNvPr>
@@ -4854,7 +4854,7 @@
           <p:cNvPr id="12" name="">
             <a:extLst xmlns:a="http://schemas.openxmlformats.org/drawingml/2006/main">
               <a:ext uri="{FF2B5EF4-FFF2-40B4-BE49-F238E27FC236}">
-                <a16:creationId xmlns:a16="http://schemas.microsoft.com/office/drawing/2014/main" id="{D33C931B-5AB4-4048-8EF3-926A2466F8C3}"/>
+                <a16:creationId xmlns:a16="http://schemas.microsoft.com/office/drawing/2014/main" id="{607AFB52-C597-4F4C-92DD-9799B711973E}"/>
               </a:ext>
             </a:extLst>
           </p:cNvPr>
@@ -4911,7 +4911,7 @@
           <p:cNvPr id="13" name="">
             <a:extLst xmlns:a="http://schemas.openxmlformats.org/drawingml/2006/main">
               <a:ext uri="{FF2B5EF4-FFF2-40B4-BE49-F238E27FC236}">
-                <a16:creationId xmlns:a16="http://schemas.microsoft.com/office/drawing/2014/main" id="{6BF7301C-459B-4B73-BA29-C15FB3AC3D61}"/>
+                <a16:creationId xmlns:a16="http://schemas.microsoft.com/office/drawing/2014/main" id="{EE98D6BA-C386-4E00-A6A1-36AAF545F0C9}"/>
               </a:ext>
             </a:extLst>
           </p:cNvPr>
@@ -4968,7 +4968,7 @@
           <p:cNvPr id="14" name="">
             <a:extLst xmlns:a="http://schemas.openxmlformats.org/drawingml/2006/main">
               <a:ext uri="{FF2B5EF4-FFF2-40B4-BE49-F238E27FC236}">
-                <a16:creationId xmlns:a16="http://schemas.microsoft.com/office/drawing/2014/main" id="{D8FD0A40-A79C-478F-9783-A753DA911B61}"/>
+                <a16:creationId xmlns:a16="http://schemas.microsoft.com/office/drawing/2014/main" id="{7C4ED00C-1BB6-4421-9EFD-3B1FA98C97D4}"/>
               </a:ext>
             </a:extLst>
           </p:cNvPr>
@@ -5002,7 +5002,7 @@
           <p:cNvPr id="15" name="">
             <a:extLst xmlns:a="http://schemas.openxmlformats.org/drawingml/2006/main">
               <a:ext uri="{FF2B5EF4-FFF2-40B4-BE49-F238E27FC236}">
-                <a16:creationId xmlns:a16="http://schemas.microsoft.com/office/drawing/2014/main" id="{509ED9DB-A119-4C59-81BA-453632A3173E}"/>
+                <a16:creationId xmlns:a16="http://schemas.microsoft.com/office/drawing/2014/main" id="{F5942A1F-E053-4AA2-96B6-99CD218BC1CD}"/>
               </a:ext>
             </a:extLst>
           </p:cNvPr>
@@ -5034,7 +5034,7 @@
           <p:cNvPr id="16" name="">
             <a:extLst xmlns:a="http://schemas.openxmlformats.org/drawingml/2006/main">
               <a:ext uri="{FF2B5EF4-FFF2-40B4-BE49-F238E27FC236}">
-                <a16:creationId xmlns:a16="http://schemas.microsoft.com/office/drawing/2014/main" id="{83CFFBC3-CF57-4707-92D9-4E1C1EDDDC05}"/>
+                <a16:creationId xmlns:a16="http://schemas.microsoft.com/office/drawing/2014/main" id="{C5E3C5A2-23F5-4A19-AC85-2891B9190528}"/>
               </a:ext>
             </a:extLst>
           </p:cNvPr>
@@ -5091,7 +5091,7 @@
           <p:cNvPr id="17" name="">
             <a:extLst xmlns:a="http://schemas.openxmlformats.org/drawingml/2006/main">
               <a:ext uri="{FF2B5EF4-FFF2-40B4-BE49-F238E27FC236}">
-                <a16:creationId xmlns:a16="http://schemas.microsoft.com/office/drawing/2014/main" id="{661BC5AC-3A68-49FF-80D0-90A78905FF83}"/>
+                <a16:creationId xmlns:a16="http://schemas.microsoft.com/office/drawing/2014/main" id="{A7038AEF-08A1-4EE1-B827-914D18416A60}"/>
               </a:ext>
             </a:extLst>
           </p:cNvPr>
@@ -5148,7 +5148,7 @@
           <p:cNvPr id="18" name="">
             <a:extLst xmlns:a="http://schemas.openxmlformats.org/drawingml/2006/main">
               <a:ext uri="{FF2B5EF4-FFF2-40B4-BE49-F238E27FC236}">
-                <a16:creationId xmlns:a16="http://schemas.microsoft.com/office/drawing/2014/main" id="{B27FB78A-6BD5-4D2C-8035-8CBE56D69FD8}"/>
+                <a16:creationId xmlns:a16="http://schemas.microsoft.com/office/drawing/2014/main" id="{658659DC-798B-4F46-A86E-AD5C65DF2FE8}"/>
               </a:ext>
             </a:extLst>
           </p:cNvPr>
@@ -5182,7 +5182,7 @@
           <p:cNvPr id="19" name="">
             <a:extLst xmlns:a="http://schemas.openxmlformats.org/drawingml/2006/main">
               <a:ext uri="{FF2B5EF4-FFF2-40B4-BE49-F238E27FC236}">
-                <a16:creationId xmlns:a16="http://schemas.microsoft.com/office/drawing/2014/main" id="{E1AC0868-8B73-4D03-9FE3-C30B454A6078}"/>
+                <a16:creationId xmlns:a16="http://schemas.microsoft.com/office/drawing/2014/main" id="{7D4FA450-FF69-4DF0-B14D-AADB8CF346E3}"/>
               </a:ext>
             </a:extLst>
           </p:cNvPr>
@@ -5214,7 +5214,7 @@
           <p:cNvPr id="20" name="">
             <a:extLst xmlns:a="http://schemas.openxmlformats.org/drawingml/2006/main">
               <a:ext uri="{FF2B5EF4-FFF2-40B4-BE49-F238E27FC236}">
-                <a16:creationId xmlns:a16="http://schemas.microsoft.com/office/drawing/2014/main" id="{35B1A6B0-953E-4B08-A58F-368696E433F3}"/>
+                <a16:creationId xmlns:a16="http://schemas.microsoft.com/office/drawing/2014/main" id="{95E16806-59E8-455D-9785-C1BAB06C003B}"/>
               </a:ext>
             </a:extLst>
           </p:cNvPr>
@@ -5271,7 +5271,7 @@
           <p:cNvPr id="21" name="">
             <a:extLst xmlns:a="http://schemas.openxmlformats.org/drawingml/2006/main">
               <a:ext uri="{FF2B5EF4-FFF2-40B4-BE49-F238E27FC236}">
-                <a16:creationId xmlns:a16="http://schemas.microsoft.com/office/drawing/2014/main" id="{AE317272-0BFC-42D6-A3D7-276099311B0C}"/>
+                <a16:creationId xmlns:a16="http://schemas.microsoft.com/office/drawing/2014/main" id="{7725D3AC-FA56-4971-88F1-C93E75687921}"/>
               </a:ext>
             </a:extLst>
           </p:cNvPr>
@@ -5328,7 +5328,7 @@
           <p:cNvPr id="22" name="">
             <a:extLst xmlns:a="http://schemas.openxmlformats.org/drawingml/2006/main">
               <a:ext uri="{FF2B5EF4-FFF2-40B4-BE49-F238E27FC236}">
-                <a16:creationId xmlns:a16="http://schemas.microsoft.com/office/drawing/2014/main" id="{B78E79CB-BB13-444A-A61E-C977725B61E0}"/>
+                <a16:creationId xmlns:a16="http://schemas.microsoft.com/office/drawing/2014/main" id="{91A1624E-15EF-4C5D-A1BB-AEDF6E3BD100}"/>
               </a:ext>
             </a:extLst>
           </p:cNvPr>
@@ -5383,7 +5383,7 @@
     </p:spTree>
     <p:extLst>
       <p:ext uri="{BB962C8B-B14F-4D97-AF65-F5344CB8AC3E}">
-        <p14:creationId xmlns:p14="http://schemas.microsoft.com/office/powerpoint/2010/main" val="1176963369"/>
+        <p14:creationId xmlns:p14="http://schemas.microsoft.com/office/powerpoint/2010/main" val="1376571674"/>
       </p:ext>
     </p:extLst>
   </p:cSld>
@@ -5584,7 +5584,7 @@
           <p:cNvPr id="23" name="">
             <a:extLst xmlns:a="http://schemas.openxmlformats.org/drawingml/2006/main">
               <a:ext uri="{FF2B5EF4-FFF2-40B4-BE49-F238E27FC236}">
-                <a16:creationId xmlns:a16="http://schemas.microsoft.com/office/drawing/2014/main" id="{FB4A98CC-1FB8-4879-A289-8ADDF02AE019}"/>
+                <a16:creationId xmlns:a16="http://schemas.microsoft.com/office/drawing/2014/main" id="{31CBA1F1-32FE-4435-B48E-E7F99D30C003}"/>
               </a:ext>
             </a:extLst>
           </p:cNvPr>
@@ -5616,7 +5616,7 @@
           <p:cNvPr id="2" name="">
             <a:extLst xmlns:a="http://schemas.openxmlformats.org/drawingml/2006/main">
               <a:ext uri="{FF2B5EF4-FFF2-40B4-BE49-F238E27FC236}">
-                <a16:creationId xmlns:a16="http://schemas.microsoft.com/office/drawing/2014/main" id="{990E9964-6853-43E9-B7CF-809FD0A1E6EC}"/>
+                <a16:creationId xmlns:a16="http://schemas.microsoft.com/office/drawing/2014/main" id="{78C63798-BC68-4CEC-84AE-17A6150BF411}"/>
               </a:ext>
             </a:extLst>
           </p:cNvPr>
@@ -5673,7 +5673,7 @@
           <p:cNvPr id="3" name="">
             <a:extLst xmlns:a="http://schemas.openxmlformats.org/drawingml/2006/main">
               <a:ext uri="{FF2B5EF4-FFF2-40B4-BE49-F238E27FC236}">
-                <a16:creationId xmlns:a16="http://schemas.microsoft.com/office/drawing/2014/main" id="{D5354B37-3278-49C7-8DA5-28C84F9A5DDC}"/>
+                <a16:creationId xmlns:a16="http://schemas.microsoft.com/office/drawing/2014/main" id="{19AE8A95-B91C-4DC0-9331-F7A68AEB9930}"/>
               </a:ext>
             </a:extLst>
           </p:cNvPr>
@@ -5705,7 +5705,7 @@
           <p:cNvPr id="4" name="">
             <a:extLst xmlns:a="http://schemas.openxmlformats.org/drawingml/2006/main">
               <a:ext uri="{FF2B5EF4-FFF2-40B4-BE49-F238E27FC236}">
-                <a16:creationId xmlns:a16="http://schemas.microsoft.com/office/drawing/2014/main" id="{35C78645-BD30-40A6-BB95-98880D4F91E0}"/>
+                <a16:creationId xmlns:a16="http://schemas.microsoft.com/office/drawing/2014/main" id="{0B33D592-B316-4EE2-8E1D-F211FC0642CF}"/>
               </a:ext>
             </a:extLst>
           </p:cNvPr>
@@ -5762,7 +5762,7 @@
           <p:cNvPr id="5" name="">
             <a:extLst xmlns:a="http://schemas.openxmlformats.org/drawingml/2006/main">
               <a:ext uri="{FF2B5EF4-FFF2-40B4-BE49-F238E27FC236}">
-                <a16:creationId xmlns:a16="http://schemas.microsoft.com/office/drawing/2014/main" id="{72D06240-0FBB-401F-BBBE-75556EE2EBF4}"/>
+                <a16:creationId xmlns:a16="http://schemas.microsoft.com/office/drawing/2014/main" id="{B721E2CA-F0E5-4951-8133-3267B4C831F1}"/>
               </a:ext>
             </a:extLst>
           </p:cNvPr>
@@ -5819,7 +5819,7 @@
           <p:cNvPr id="6" name="">
             <a:extLst xmlns:a="http://schemas.openxmlformats.org/drawingml/2006/main">
               <a:ext uri="{FF2B5EF4-FFF2-40B4-BE49-F238E27FC236}">
-                <a16:creationId xmlns:a16="http://schemas.microsoft.com/office/drawing/2014/main" id="{E81F5295-469B-419D-A527-64950D3969A2}"/>
+                <a16:creationId xmlns:a16="http://schemas.microsoft.com/office/drawing/2014/main" id="{BBC8267D-C9D8-46E3-9F92-D3916D87E329}"/>
               </a:ext>
             </a:extLst>
           </p:cNvPr>
@@ -5876,7 +5876,7 @@
           <p:cNvPr id="7" name="">
             <a:extLst xmlns:a="http://schemas.openxmlformats.org/drawingml/2006/main">
               <a:ext uri="{FF2B5EF4-FFF2-40B4-BE49-F238E27FC236}">
-                <a16:creationId xmlns:a16="http://schemas.microsoft.com/office/drawing/2014/main" id="{C8978EC6-D4F1-4BED-A21D-707141D1DB80}"/>
+                <a16:creationId xmlns:a16="http://schemas.microsoft.com/office/drawing/2014/main" id="{A699E1D2-F6A6-4B16-9E12-AFAD647D2A79}"/>
               </a:ext>
             </a:extLst>
           </p:cNvPr>
@@ -5908,7 +5908,7 @@
           <p:cNvPr id="8" name="">
             <a:extLst xmlns:a="http://schemas.openxmlformats.org/drawingml/2006/main">
               <a:ext uri="{FF2B5EF4-FFF2-40B4-BE49-F238E27FC236}">
-                <a16:creationId xmlns:a16="http://schemas.microsoft.com/office/drawing/2014/main" id="{6BFB0E95-66F2-459F-B692-146BA2402E3C}"/>
+                <a16:creationId xmlns:a16="http://schemas.microsoft.com/office/drawing/2014/main" id="{65832270-7C29-4604-9D3C-CA6001DC2648}"/>
               </a:ext>
             </a:extLst>
           </p:cNvPr>
@@ -5965,7 +5965,7 @@
           <p:cNvPr id="9" name="">
             <a:extLst xmlns:a="http://schemas.openxmlformats.org/drawingml/2006/main">
               <a:ext uri="{FF2B5EF4-FFF2-40B4-BE49-F238E27FC236}">
-                <a16:creationId xmlns:a16="http://schemas.microsoft.com/office/drawing/2014/main" id="{0435B7B1-1629-4611-B37E-DDC53B074A63}"/>
+                <a16:creationId xmlns:a16="http://schemas.microsoft.com/office/drawing/2014/main" id="{8B3399F5-4307-4D0E-8CC3-5D4FF4405EEC}"/>
               </a:ext>
             </a:extLst>
           </p:cNvPr>
@@ -6022,7 +6022,7 @@
           <p:cNvPr id="10" name="">
             <a:extLst xmlns:a="http://schemas.openxmlformats.org/drawingml/2006/main">
               <a:ext uri="{FF2B5EF4-FFF2-40B4-BE49-F238E27FC236}">
-                <a16:creationId xmlns:a16="http://schemas.microsoft.com/office/drawing/2014/main" id="{CE6302DF-B2CD-49F1-85C2-4F0E82D722DB}"/>
+                <a16:creationId xmlns:a16="http://schemas.microsoft.com/office/drawing/2014/main" id="{19676921-9CD7-4458-B289-61E0D2D4C380}"/>
               </a:ext>
             </a:extLst>
           </p:cNvPr>
@@ -6056,7 +6056,7 @@
           <p:cNvPr id="11" name="">
             <a:extLst xmlns:a="http://schemas.openxmlformats.org/drawingml/2006/main">
               <a:ext uri="{FF2B5EF4-FFF2-40B4-BE49-F238E27FC236}">
-                <a16:creationId xmlns:a16="http://schemas.microsoft.com/office/drawing/2014/main" id="{ACE6E3FE-BA36-474E-8A25-CB5EF0968A57}"/>
+                <a16:creationId xmlns:a16="http://schemas.microsoft.com/office/drawing/2014/main" id="{125194C7-CC36-4259-A3CB-F22B484CDE24}"/>
               </a:ext>
             </a:extLst>
           </p:cNvPr>
@@ -6088,7 +6088,7 @@
           <p:cNvPr id="12" name="">
             <a:extLst xmlns:a="http://schemas.openxmlformats.org/drawingml/2006/main">
               <a:ext uri="{FF2B5EF4-FFF2-40B4-BE49-F238E27FC236}">
-                <a16:creationId xmlns:a16="http://schemas.microsoft.com/office/drawing/2014/main" id="{743AE803-F332-4B2C-A36C-AB17215262E7}"/>
+                <a16:creationId xmlns:a16="http://schemas.microsoft.com/office/drawing/2014/main" id="{1090F8E5-D969-4869-BD9C-51305EA9F8CA}"/>
               </a:ext>
             </a:extLst>
           </p:cNvPr>
@@ -6145,7 +6145,7 @@
           <p:cNvPr id="13" name="">
             <a:extLst xmlns:a="http://schemas.openxmlformats.org/drawingml/2006/main">
               <a:ext uri="{FF2B5EF4-FFF2-40B4-BE49-F238E27FC236}">
-                <a16:creationId xmlns:a16="http://schemas.microsoft.com/office/drawing/2014/main" id="{3B54EC26-2103-464D-985A-F06BBD42BA90}"/>
+                <a16:creationId xmlns:a16="http://schemas.microsoft.com/office/drawing/2014/main" id="{1D44EADC-4B9F-4BCF-A076-8C5CFCF07BB5}"/>
               </a:ext>
             </a:extLst>
           </p:cNvPr>
@@ -6202,7 +6202,7 @@
           <p:cNvPr id="14" name="">
             <a:extLst xmlns:a="http://schemas.openxmlformats.org/drawingml/2006/main">
               <a:ext uri="{FF2B5EF4-FFF2-40B4-BE49-F238E27FC236}">
-                <a16:creationId xmlns:a16="http://schemas.microsoft.com/office/drawing/2014/main" id="{333563AB-8460-4153-9F50-D5581636AF5C}"/>
+                <a16:creationId xmlns:a16="http://schemas.microsoft.com/office/drawing/2014/main" id="{52645858-EB98-4FDE-8764-BE4F00006800}"/>
               </a:ext>
             </a:extLst>
           </p:cNvPr>
@@ -6236,7 +6236,7 @@
           <p:cNvPr id="15" name="">
             <a:extLst xmlns:a="http://schemas.openxmlformats.org/drawingml/2006/main">
               <a:ext uri="{FF2B5EF4-FFF2-40B4-BE49-F238E27FC236}">
-                <a16:creationId xmlns:a16="http://schemas.microsoft.com/office/drawing/2014/main" id="{2943A035-FA68-4128-8DBA-63A9A09F1AC5}"/>
+                <a16:creationId xmlns:a16="http://schemas.microsoft.com/office/drawing/2014/main" id="{7F6C52BA-6E39-41F5-BB42-9A4CE1A8EB05}"/>
               </a:ext>
             </a:extLst>
           </p:cNvPr>
@@ -6268,7 +6268,7 @@
           <p:cNvPr id="16" name="">
             <a:extLst xmlns:a="http://schemas.openxmlformats.org/drawingml/2006/main">
               <a:ext uri="{FF2B5EF4-FFF2-40B4-BE49-F238E27FC236}">
-                <a16:creationId xmlns:a16="http://schemas.microsoft.com/office/drawing/2014/main" id="{BCEE9CE8-5BC2-4CE5-A384-3CB2CD203931}"/>
+                <a16:creationId xmlns:a16="http://schemas.microsoft.com/office/drawing/2014/main" id="{2FE5223C-8065-47F1-84F7-AE24211E7B62}"/>
               </a:ext>
             </a:extLst>
           </p:cNvPr>
@@ -6325,7 +6325,7 @@
           <p:cNvPr id="17" name="">
             <a:extLst xmlns:a="http://schemas.openxmlformats.org/drawingml/2006/main">
               <a:ext uri="{FF2B5EF4-FFF2-40B4-BE49-F238E27FC236}">
-                <a16:creationId xmlns:a16="http://schemas.microsoft.com/office/drawing/2014/main" id="{0010A2A8-899E-4DB4-A710-C940DD844DAC}"/>
+                <a16:creationId xmlns:a16="http://schemas.microsoft.com/office/drawing/2014/main" id="{9A97236D-C202-4860-B1A6-5F9528A3333C}"/>
               </a:ext>
             </a:extLst>
           </p:cNvPr>
@@ -6382,7 +6382,7 @@
           <p:cNvPr id="18" name="">
             <a:extLst xmlns:a="http://schemas.openxmlformats.org/drawingml/2006/main">
               <a:ext uri="{FF2B5EF4-FFF2-40B4-BE49-F238E27FC236}">
-                <a16:creationId xmlns:a16="http://schemas.microsoft.com/office/drawing/2014/main" id="{E8853C89-F068-48C4-BA86-EB07487E3450}"/>
+                <a16:creationId xmlns:a16="http://schemas.microsoft.com/office/drawing/2014/main" id="{9C942858-4FFF-402B-8772-BA85518EEBD2}"/>
               </a:ext>
             </a:extLst>
           </p:cNvPr>
@@ -6416,7 +6416,7 @@
           <p:cNvPr id="19" name="">
             <a:extLst xmlns:a="http://schemas.openxmlformats.org/drawingml/2006/main">
               <a:ext uri="{FF2B5EF4-FFF2-40B4-BE49-F238E27FC236}">
-                <a16:creationId xmlns:a16="http://schemas.microsoft.com/office/drawing/2014/main" id="{F6FD209A-6EF4-4390-B11F-280E2E089F22}"/>
+                <a16:creationId xmlns:a16="http://schemas.microsoft.com/office/drawing/2014/main" id="{CD46B3EF-E6F8-44CB-B8AF-021375F6B1AF}"/>
               </a:ext>
             </a:extLst>
           </p:cNvPr>
@@ -6448,7 +6448,7 @@
           <p:cNvPr id="20" name="">
             <a:extLst xmlns:a="http://schemas.openxmlformats.org/drawingml/2006/main">
               <a:ext uri="{FF2B5EF4-FFF2-40B4-BE49-F238E27FC236}">
-                <a16:creationId xmlns:a16="http://schemas.microsoft.com/office/drawing/2014/main" id="{227E1C1B-4972-47D8-95DB-7A410F99B5AF}"/>
+                <a16:creationId xmlns:a16="http://schemas.microsoft.com/office/drawing/2014/main" id="{D23E1DA4-78DA-4751-999B-BB22B561FEE0}"/>
               </a:ext>
             </a:extLst>
           </p:cNvPr>
@@ -6505,7 +6505,7 @@
           <p:cNvPr id="21" name="">
             <a:extLst xmlns:a="http://schemas.openxmlformats.org/drawingml/2006/main">
               <a:ext uri="{FF2B5EF4-FFF2-40B4-BE49-F238E27FC236}">
-                <a16:creationId xmlns:a16="http://schemas.microsoft.com/office/drawing/2014/main" id="{D21F1CD0-D85C-4277-BC66-A61E6358DC7F}"/>
+                <a16:creationId xmlns:a16="http://schemas.microsoft.com/office/drawing/2014/main" id="{A692D458-0360-4485-B7FC-E4EEF46A1C37}"/>
               </a:ext>
             </a:extLst>
           </p:cNvPr>
@@ -6562,7 +6562,7 @@
           <p:cNvPr id="22" name="">
             <a:extLst xmlns:a="http://schemas.openxmlformats.org/drawingml/2006/main">
               <a:ext uri="{FF2B5EF4-FFF2-40B4-BE49-F238E27FC236}">
-                <a16:creationId xmlns:a16="http://schemas.microsoft.com/office/drawing/2014/main" id="{258E340F-1F6D-41D2-81F1-5095AA7A4620}"/>
+                <a16:creationId xmlns:a16="http://schemas.microsoft.com/office/drawing/2014/main" id="{1D80B1BD-935C-43F3-9878-C0BAD7585746}"/>
               </a:ext>
             </a:extLst>
           </p:cNvPr>
@@ -6617,7 +6617,7 @@
     </p:spTree>
     <p:extLst>
       <p:ext uri="{BB962C8B-B14F-4D97-AF65-F5344CB8AC3E}">
-        <p14:creationId xmlns:p14="http://schemas.microsoft.com/office/powerpoint/2010/main" val="14310721"/>
+        <p14:creationId xmlns:p14="http://schemas.microsoft.com/office/powerpoint/2010/main" val="1351046853"/>
       </p:ext>
     </p:extLst>
   </p:cSld>
@@ -6818,7 +6818,7 @@
           <p:cNvPr id="16" name="">
             <a:extLst xmlns:a="http://schemas.openxmlformats.org/drawingml/2006/main">
               <a:ext uri="{FF2B5EF4-FFF2-40B4-BE49-F238E27FC236}">
-                <a16:creationId xmlns:a16="http://schemas.microsoft.com/office/drawing/2014/main" id="{865BE68E-8ECA-4E4A-9A4D-8CD4090CC1A6}"/>
+                <a16:creationId xmlns:a16="http://schemas.microsoft.com/office/drawing/2014/main" id="{07CF7059-6FF4-4FC8-A107-BC5A96B3DCC4}"/>
               </a:ext>
             </a:extLst>
           </p:cNvPr>
@@ -6850,7 +6850,7 @@
           <p:cNvPr id="2" name="">
             <a:extLst xmlns:a="http://schemas.openxmlformats.org/drawingml/2006/main">
               <a:ext uri="{FF2B5EF4-FFF2-40B4-BE49-F238E27FC236}">
-                <a16:creationId xmlns:a16="http://schemas.microsoft.com/office/drawing/2014/main" id="{35E31AAE-8655-48FB-93A9-7C38609C532D}"/>
+                <a16:creationId xmlns:a16="http://schemas.microsoft.com/office/drawing/2014/main" id="{B271FCAF-3ED8-476C-83A4-4DE664F12BAC}"/>
               </a:ext>
             </a:extLst>
           </p:cNvPr>
@@ -6907,7 +6907,7 @@
           <p:cNvPr id="3" name="">
             <a:extLst xmlns:a="http://schemas.openxmlformats.org/drawingml/2006/main">
               <a:ext uri="{FF2B5EF4-FFF2-40B4-BE49-F238E27FC236}">
-                <a16:creationId xmlns:a16="http://schemas.microsoft.com/office/drawing/2014/main" id="{5627CD0F-5032-4317-B5FA-CAC152CEEB07}"/>
+                <a16:creationId xmlns:a16="http://schemas.microsoft.com/office/drawing/2014/main" id="{7FD75C24-5CDD-48F7-B681-C706C0DEB786}"/>
               </a:ext>
             </a:extLst>
           </p:cNvPr>
@@ -6939,7 +6939,7 @@
           <p:cNvPr id="4" name="">
             <a:extLst xmlns:a="http://schemas.openxmlformats.org/drawingml/2006/main">
               <a:ext uri="{FF2B5EF4-FFF2-40B4-BE49-F238E27FC236}">
-                <a16:creationId xmlns:a16="http://schemas.microsoft.com/office/drawing/2014/main" id="{DCE10015-A064-4339-8FA4-59093CF6A245}"/>
+                <a16:creationId xmlns:a16="http://schemas.microsoft.com/office/drawing/2014/main" id="{DAEA9080-5E0E-4161-B411-965DA5A6A643}"/>
               </a:ext>
             </a:extLst>
           </p:cNvPr>
@@ -6996,7 +6996,7 @@
           <p:cNvPr id="5" name="">
             <a:extLst xmlns:a="http://schemas.openxmlformats.org/drawingml/2006/main">
               <a:ext uri="{FF2B5EF4-FFF2-40B4-BE49-F238E27FC236}">
-                <a16:creationId xmlns:a16="http://schemas.microsoft.com/office/drawing/2014/main" id="{1B156244-8032-4D3A-893C-A916A66679DA}"/>
+                <a16:creationId xmlns:a16="http://schemas.microsoft.com/office/drawing/2014/main" id="{F947FCAF-6A05-424A-88D4-5AEC803CD05D}"/>
               </a:ext>
             </a:extLst>
           </p:cNvPr>
@@ -7053,7 +7053,7 @@
           <p:cNvPr id="6" name="">
             <a:extLst xmlns:a="http://schemas.openxmlformats.org/drawingml/2006/main">
               <a:ext uri="{FF2B5EF4-FFF2-40B4-BE49-F238E27FC236}">
-                <a16:creationId xmlns:a16="http://schemas.microsoft.com/office/drawing/2014/main" id="{D1314B72-25F3-4788-9CD4-4362DA8C225F}"/>
+                <a16:creationId xmlns:a16="http://schemas.microsoft.com/office/drawing/2014/main" id="{60187C13-426B-4CE7-9377-C72F5D8C2CA0}"/>
               </a:ext>
             </a:extLst>
           </p:cNvPr>
@@ -7110,7 +7110,7 @@
           <p:cNvPr id="7" name="">
             <a:extLst xmlns:a="http://schemas.openxmlformats.org/drawingml/2006/main">
               <a:ext uri="{FF2B5EF4-FFF2-40B4-BE49-F238E27FC236}">
-                <a16:creationId xmlns:a16="http://schemas.microsoft.com/office/drawing/2014/main" id="{AE27EC65-0598-4502-B9DE-4142585A4FB5}"/>
+                <a16:creationId xmlns:a16="http://schemas.microsoft.com/office/drawing/2014/main" id="{D2F2CF3A-A027-402B-B3D5-85B7238001F2}"/>
               </a:ext>
             </a:extLst>
           </p:cNvPr>
@@ -7142,7 +7142,7 @@
           <p:cNvPr id="8" name="">
             <a:extLst xmlns:a="http://schemas.openxmlformats.org/drawingml/2006/main">
               <a:ext uri="{FF2B5EF4-FFF2-40B4-BE49-F238E27FC236}">
-                <a16:creationId xmlns:a16="http://schemas.microsoft.com/office/drawing/2014/main" id="{BB1BA80A-3ACE-423F-BF53-EA53384FE72A}"/>
+                <a16:creationId xmlns:a16="http://schemas.microsoft.com/office/drawing/2014/main" id="{4D0D75CE-B69A-42E1-A115-7A5CAB523E76}"/>
               </a:ext>
             </a:extLst>
           </p:cNvPr>
@@ -7199,7 +7199,7 @@
           <p:cNvPr id="9" name="">
             <a:extLst xmlns:a="http://schemas.openxmlformats.org/drawingml/2006/main">
               <a:ext uri="{FF2B5EF4-FFF2-40B4-BE49-F238E27FC236}">
-                <a16:creationId xmlns:a16="http://schemas.microsoft.com/office/drawing/2014/main" id="{091FE8C7-6B3D-40BB-A6CA-F6B8AE382F54}"/>
+                <a16:creationId xmlns:a16="http://schemas.microsoft.com/office/drawing/2014/main" id="{73C7029D-30C6-4A4A-A5CA-A6127FA9B3F3}"/>
               </a:ext>
             </a:extLst>
           </p:cNvPr>
@@ -7256,7 +7256,7 @@
           <p:cNvPr id="10" name="">
             <a:extLst xmlns:a="http://schemas.openxmlformats.org/drawingml/2006/main">
               <a:ext uri="{FF2B5EF4-FFF2-40B4-BE49-F238E27FC236}">
-                <a16:creationId xmlns:a16="http://schemas.microsoft.com/office/drawing/2014/main" id="{F21E5064-916A-4E7E-ADBB-A2C589C18C41}"/>
+                <a16:creationId xmlns:a16="http://schemas.microsoft.com/office/drawing/2014/main" id="{64E251F7-C0DE-4AF2-93DC-98DD0EDBAFFD}"/>
               </a:ext>
             </a:extLst>
           </p:cNvPr>
@@ -7313,7 +7313,7 @@
           <p:cNvPr id="11" name="">
             <a:extLst xmlns:a="http://schemas.openxmlformats.org/drawingml/2006/main">
               <a:ext uri="{FF2B5EF4-FFF2-40B4-BE49-F238E27FC236}">
-                <a16:creationId xmlns:a16="http://schemas.microsoft.com/office/drawing/2014/main" id="{63317150-AB12-429A-9E4E-52C209D4178D}"/>
+                <a16:creationId xmlns:a16="http://schemas.microsoft.com/office/drawing/2014/main" id="{DA75D104-7CD1-432E-9013-3F5ABCF8B8A2}"/>
               </a:ext>
             </a:extLst>
           </p:cNvPr>
@@ -7345,7 +7345,7 @@
           <p:cNvPr id="12" name="">
             <a:extLst xmlns:a="http://schemas.openxmlformats.org/drawingml/2006/main">
               <a:ext uri="{FF2B5EF4-FFF2-40B4-BE49-F238E27FC236}">
-                <a16:creationId xmlns:a16="http://schemas.microsoft.com/office/drawing/2014/main" id="{A2F49FB8-B4ED-4C04-8267-54117032CA1B}"/>
+                <a16:creationId xmlns:a16="http://schemas.microsoft.com/office/drawing/2014/main" id="{15960E52-9B88-4875-B23E-E2854ACF2E91}"/>
               </a:ext>
             </a:extLst>
           </p:cNvPr>
@@ -7402,7 +7402,7 @@
           <p:cNvPr id="13" name="">
             <a:extLst xmlns:a="http://schemas.openxmlformats.org/drawingml/2006/main">
               <a:ext uri="{FF2B5EF4-FFF2-40B4-BE49-F238E27FC236}">
-                <a16:creationId xmlns:a16="http://schemas.microsoft.com/office/drawing/2014/main" id="{E7C3A918-8871-4167-B3A7-108162163E42}"/>
+                <a16:creationId xmlns:a16="http://schemas.microsoft.com/office/drawing/2014/main" id="{1DEDD311-9184-4431-9E10-9A32401AD6EB}"/>
               </a:ext>
             </a:extLst>
           </p:cNvPr>
@@ -7459,7 +7459,7 @@
           <p:cNvPr id="14" name="">
             <a:extLst xmlns:a="http://schemas.openxmlformats.org/drawingml/2006/main">
               <a:ext uri="{FF2B5EF4-FFF2-40B4-BE49-F238E27FC236}">
-                <a16:creationId xmlns:a16="http://schemas.microsoft.com/office/drawing/2014/main" id="{26E3D748-64D1-4FEF-A252-ACAE78CC46D4}"/>
+                <a16:creationId xmlns:a16="http://schemas.microsoft.com/office/drawing/2014/main" id="{1C21B4A1-357F-430A-80FD-22DBDCCBACCB}"/>
               </a:ext>
             </a:extLst>
           </p:cNvPr>
@@ -7516,7 +7516,7 @@
           <p:cNvPr id="15" name="">
             <a:extLst xmlns:a="http://schemas.openxmlformats.org/drawingml/2006/main">
               <a:ext uri="{FF2B5EF4-FFF2-40B4-BE49-F238E27FC236}">
-                <a16:creationId xmlns:a16="http://schemas.microsoft.com/office/drawing/2014/main" id="{BE49505D-2781-462A-ADAD-9F735F243517}"/>
+                <a16:creationId xmlns:a16="http://schemas.microsoft.com/office/drawing/2014/main" id="{53B80B18-8123-4FF9-9CE8-04DFF03C72A2}"/>
               </a:ext>
             </a:extLst>
           </p:cNvPr>
@@ -7571,7 +7571,7 @@
     </p:spTree>
     <p:extLst>
       <p:ext uri="{BB962C8B-B14F-4D97-AF65-F5344CB8AC3E}">
-        <p14:creationId xmlns:p14="http://schemas.microsoft.com/office/powerpoint/2010/main" val="1465637869"/>
+        <p14:creationId xmlns:p14="http://schemas.microsoft.com/office/powerpoint/2010/main" val="1240592184"/>
       </p:ext>
     </p:extLst>
   </p:cSld>
@@ -7769,10 +7769,10 @@
       </p:grpSpPr>
       <p:sp>
         <p:nvSpPr>
-          <p:cNvPr id="23" name="">
-            <a:extLst xmlns:a="http://schemas.openxmlformats.org/drawingml/2006/main">
-              <a:ext uri="{FF2B5EF4-FFF2-40B4-BE49-F238E27FC236}">
-                <a16:creationId xmlns:a16="http://schemas.microsoft.com/office/drawing/2014/main" id="{83C64237-F68E-4286-9A62-798A6A573E11}"/>
+          <p:cNvPr id="26" name="">
+            <a:extLst xmlns:a="http://schemas.openxmlformats.org/drawingml/2006/main">
+              <a:ext uri="{FF2B5EF4-FFF2-40B4-BE49-F238E27FC236}">
+                <a16:creationId xmlns:a16="http://schemas.microsoft.com/office/drawing/2014/main" id="{BEAE7D47-C728-4B7D-A902-DDF7A7862F61}"/>
               </a:ext>
             </a:extLst>
           </p:cNvPr>
@@ -7804,7 +7804,7 @@
           <p:cNvPr id="2" name="">
             <a:extLst xmlns:a="http://schemas.openxmlformats.org/drawingml/2006/main">
               <a:ext uri="{FF2B5EF4-FFF2-40B4-BE49-F238E27FC236}">
-                <a16:creationId xmlns:a16="http://schemas.microsoft.com/office/drawing/2014/main" id="{73F032EA-C734-4CB6-BDC9-D55A4B836C8C}"/>
+                <a16:creationId xmlns:a16="http://schemas.microsoft.com/office/drawing/2014/main" id="{D0547688-973A-4B2E-B2EF-63709C3B2C25}"/>
               </a:ext>
             </a:extLst>
           </p:cNvPr>
@@ -7861,7 +7861,7 @@
           <p:cNvPr id="3" name="">
             <a:extLst xmlns:a="http://schemas.openxmlformats.org/drawingml/2006/main">
               <a:ext uri="{FF2B5EF4-FFF2-40B4-BE49-F238E27FC236}">
-                <a16:creationId xmlns:a16="http://schemas.microsoft.com/office/drawing/2014/main" id="{927D09B7-207F-4463-A1B3-31954D848CB7}"/>
+                <a16:creationId xmlns:a16="http://schemas.microsoft.com/office/drawing/2014/main" id="{620423E3-FD2F-43DB-8339-E82007881289}"/>
               </a:ext>
             </a:extLst>
           </p:cNvPr>
@@ -7893,7 +7893,7 @@
           <p:cNvPr id="4" name="">
             <a:extLst xmlns:a="http://schemas.openxmlformats.org/drawingml/2006/main">
               <a:ext uri="{FF2B5EF4-FFF2-40B4-BE49-F238E27FC236}">
-                <a16:creationId xmlns:a16="http://schemas.microsoft.com/office/drawing/2014/main" id="{1D07D076-47A1-476E-BD53-42E2F0C5DAEB}"/>
+                <a16:creationId xmlns:a16="http://schemas.microsoft.com/office/drawing/2014/main" id="{3AE5B2AA-ED0C-4C05-B57E-F194E69739F6}"/>
               </a:ext>
             </a:extLst>
           </p:cNvPr>
@@ -7950,7 +7950,7 @@
           <p:cNvPr id="5" name="">
             <a:extLst xmlns:a="http://schemas.openxmlformats.org/drawingml/2006/main">
               <a:ext uri="{FF2B5EF4-FFF2-40B4-BE49-F238E27FC236}">
-                <a16:creationId xmlns:a16="http://schemas.microsoft.com/office/drawing/2014/main" id="{35419135-313D-4414-A4E1-22C78225DBF1}"/>
+                <a16:creationId xmlns:a16="http://schemas.microsoft.com/office/drawing/2014/main" id="{AD18D437-4A91-46A5-B8C4-E30C1E0204D8}"/>
               </a:ext>
             </a:extLst>
           </p:cNvPr>
@@ -8007,7 +8007,7 @@
           <p:cNvPr id="6" name="">
             <a:extLst xmlns:a="http://schemas.openxmlformats.org/drawingml/2006/main">
               <a:ext uri="{FF2B5EF4-FFF2-40B4-BE49-F238E27FC236}">
-                <a16:creationId xmlns:a16="http://schemas.microsoft.com/office/drawing/2014/main" id="{FDA6AB48-C028-4FFD-9459-3E0E842789EE}"/>
+                <a16:creationId xmlns:a16="http://schemas.microsoft.com/office/drawing/2014/main" id="{DE44BD47-A2E2-4F0D-8640-F1E435FEA93B}"/>
               </a:ext>
             </a:extLst>
           </p:cNvPr>
@@ -8064,7 +8064,7 @@
           <p:cNvPr id="7" name="">
             <a:extLst xmlns:a="http://schemas.openxmlformats.org/drawingml/2006/main">
               <a:ext uri="{FF2B5EF4-FFF2-40B4-BE49-F238E27FC236}">
-                <a16:creationId xmlns:a16="http://schemas.microsoft.com/office/drawing/2014/main" id="{0D71B10F-D8AB-4B2F-8AD9-C3846D5CE505}"/>
+                <a16:creationId xmlns:a16="http://schemas.microsoft.com/office/drawing/2014/main" id="{2E5FCA59-3DA3-4676-91F4-9E83E058DBBD}"/>
               </a:ext>
             </a:extLst>
           </p:cNvPr>
@@ -8096,7 +8096,7 @@
           <p:cNvPr id="8" name="">
             <a:extLst xmlns:a="http://schemas.openxmlformats.org/drawingml/2006/main">
               <a:ext uri="{FF2B5EF4-FFF2-40B4-BE49-F238E27FC236}">
-                <a16:creationId xmlns:a16="http://schemas.microsoft.com/office/drawing/2014/main" id="{9B63BABA-75AC-4752-A038-95AB55CDA698}"/>
+                <a16:creationId xmlns:a16="http://schemas.microsoft.com/office/drawing/2014/main" id="{65374736-2A01-4FA2-9129-E4E638A5C222}"/>
               </a:ext>
             </a:extLst>
           </p:cNvPr>
@@ -8153,7 +8153,7 @@
           <p:cNvPr id="9" name="">
             <a:extLst xmlns:a="http://schemas.openxmlformats.org/drawingml/2006/main">
               <a:ext uri="{FF2B5EF4-FFF2-40B4-BE49-F238E27FC236}">
-                <a16:creationId xmlns:a16="http://schemas.microsoft.com/office/drawing/2014/main" id="{3A1BECE9-8B04-406F-BDBC-EFAAE846EAE2}"/>
+                <a16:creationId xmlns:a16="http://schemas.microsoft.com/office/drawing/2014/main" id="{5C87B2E2-DB1B-4914-9B6C-F89FC39D77C9}"/>
               </a:ext>
             </a:extLst>
           </p:cNvPr>
@@ -8210,19 +8210,19 @@
           <p:cNvPr id="10" name="">
             <a:extLst xmlns:a="http://schemas.openxmlformats.org/drawingml/2006/main">
               <a:ext uri="{FF2B5EF4-FFF2-40B4-BE49-F238E27FC236}">
-                <a16:creationId xmlns:a16="http://schemas.microsoft.com/office/drawing/2014/main" id="{E49C1706-1EB2-4555-A802-F1F4B73817EB}"/>
-              </a:ext>
-            </a:extLst>
-          </p:cNvPr>
-          <p:cNvSpPr>
-            <a:spLocks xmlns:a="http://schemas.openxmlformats.org/drawingml/2006/main" noGrp="1"/>
-          </p:cNvSpPr>
-          <p:nvPr/>
-        </p:nvSpPr>
-        <p:spPr>
-          <a:xfrm xmlns:a="http://schemas.openxmlformats.org/drawingml/2006/main">
-            <a:off x="914400" y="1257300"/>
-            <a:ext cx="10363200" cy="781050"/>
+                <a16:creationId xmlns:a16="http://schemas.microsoft.com/office/drawing/2014/main" id="{7356F8BC-7C9B-4CEF-A5FE-7304A5B07699}"/>
+              </a:ext>
+            </a:extLst>
+          </p:cNvPr>
+          <p:cNvSpPr>
+            <a:spLocks xmlns:a="http://schemas.openxmlformats.org/drawingml/2006/main" noGrp="1"/>
+          </p:cNvSpPr>
+          <p:nvPr/>
+        </p:nvSpPr>
+        <p:spPr>
+          <a:xfrm xmlns:a="http://schemas.openxmlformats.org/drawingml/2006/main">
+            <a:off x="857250" y="1219200"/>
+            <a:ext cx="10477500" cy="742950"/>
           </a:xfrm>
           <a:prstGeom xmlns:a="http://schemas.openxmlformats.org/drawingml/2006/main" prst="rect">
             <a:avLst/>
@@ -8239,7 +8239,7 @@
           <a:lstStyle xmlns:a="http://schemas.openxmlformats.org/drawingml/2006/main"/>
           <a:p xmlns:a="http://schemas.openxmlformats.org/drawingml/2006/main">
             <a:pPr algn="ctr">
-              <a:defRPr sz="2175" b="1">
+              <a:defRPr sz="2100" b="1">
                 <a:solidFill>
                   <a:srgbClr val="17253A"/>
                 </a:solidFill>
@@ -8249,7 +8249,7 @@
               </a:defRPr>
             </a:pPr>
             <a:r>
-              <a:rPr sz="2175" b="1">
+              <a:rPr sz="2100" b="1">
                 <a:solidFill>
                   <a:srgbClr val="17253A"/>
                 </a:solidFill>
@@ -8267,28 +8267,30 @@
           <p:cNvPr id="11" name="">
             <a:extLst xmlns:a="http://schemas.openxmlformats.org/drawingml/2006/main">
               <a:ext uri="{FF2B5EF4-FFF2-40B4-BE49-F238E27FC236}">
-                <a16:creationId xmlns:a16="http://schemas.microsoft.com/office/drawing/2014/main" id="{8A761564-A9FF-4439-8C64-8E168D5B560E}"/>
-              </a:ext>
-            </a:extLst>
-          </p:cNvPr>
-          <p:cNvSpPr>
-            <a:spLocks xmlns:a="http://schemas.openxmlformats.org/drawingml/2006/main" noGrp="1"/>
-          </p:cNvSpPr>
-          <p:nvPr/>
-        </p:nvSpPr>
-        <p:spPr>
-          <a:xfrm xmlns:a="http://schemas.openxmlformats.org/drawingml/2006/main">
-            <a:off x="1000125" y="2247900"/>
-            <a:ext cx="476250" cy="476250"/>
-          </a:xfrm>
-          <a:prstGeom xmlns:a="http://schemas.openxmlformats.org/drawingml/2006/main" prst="ellipse">
+                <a16:creationId xmlns:a16="http://schemas.microsoft.com/office/drawing/2014/main" id="{00C50D0C-728A-4E17-9BE6-67C4C521F7BB}"/>
+              </a:ext>
+            </a:extLst>
+          </p:cNvPr>
+          <p:cNvSpPr>
+            <a:spLocks xmlns:a="http://schemas.openxmlformats.org/drawingml/2006/main" noGrp="1"/>
+          </p:cNvSpPr>
+          <p:nvPr/>
+        </p:nvSpPr>
+        <p:spPr>
+          <a:xfrm xmlns:a="http://schemas.openxmlformats.org/drawingml/2006/main">
+            <a:off x="971550" y="2124075"/>
+            <a:ext cx="38100" cy="3524250"/>
+          </a:xfrm>
+          <a:prstGeom xmlns:a="http://schemas.openxmlformats.org/drawingml/2006/main" prst="rect">
             <a:avLst/>
           </a:prstGeom>
           <a:solidFill xmlns:a="http://schemas.openxmlformats.org/drawingml/2006/main">
-            <a:srgbClr val="18324A"/>
+            <a:srgbClr val="2C6E73"/>
           </a:solidFill>
           <a:ln xmlns:a="http://schemas.openxmlformats.org/drawingml/2006/main" w="0">
-            <a:noFill/>
+            <a:solidFill>
+              <a:srgbClr val="2C6E73"/>
+            </a:solidFill>
           </a:ln>
         </p:spPr>
       </p:sp>
@@ -8297,19 +8299,19 @@
           <p:cNvPr id="12" name="">
             <a:extLst xmlns:a="http://schemas.openxmlformats.org/drawingml/2006/main">
               <a:ext uri="{FF2B5EF4-FFF2-40B4-BE49-F238E27FC236}">
-                <a16:creationId xmlns:a16="http://schemas.microsoft.com/office/drawing/2014/main" id="{9E41254E-A582-4ED8-A877-927AAEFFF4E0}"/>
-              </a:ext>
-            </a:extLst>
-          </p:cNvPr>
-          <p:cNvSpPr>
-            <a:spLocks xmlns:a="http://schemas.openxmlformats.org/drawingml/2006/main" noGrp="1"/>
-          </p:cNvSpPr>
-          <p:nvPr/>
-        </p:nvSpPr>
-        <p:spPr>
-          <a:xfrm xmlns:a="http://schemas.openxmlformats.org/drawingml/2006/main">
-            <a:off x="1000125" y="2276475"/>
-            <a:ext cx="476250" cy="419100"/>
+                <a16:creationId xmlns:a16="http://schemas.microsoft.com/office/drawing/2014/main" id="{724CB6A2-95AB-4FCE-B9C3-FD87377BE197}"/>
+              </a:ext>
+            </a:extLst>
+          </p:cNvPr>
+          <p:cNvSpPr>
+            <a:spLocks xmlns:a="http://schemas.openxmlformats.org/drawingml/2006/main" noGrp="1"/>
+          </p:cNvSpPr>
+          <p:nvPr/>
+        </p:nvSpPr>
+        <p:spPr>
+          <a:xfrm xmlns:a="http://schemas.openxmlformats.org/drawingml/2006/main">
+            <a:off x="1162050" y="2200275"/>
+            <a:ext cx="400050" cy="400050"/>
           </a:xfrm>
           <a:prstGeom xmlns:a="http://schemas.openxmlformats.org/drawingml/2006/main" prst="rect">
             <a:avLst/>
@@ -8326,9 +8328,9 @@
           <a:lstStyle xmlns:a="http://schemas.openxmlformats.org/drawingml/2006/main"/>
           <a:p xmlns:a="http://schemas.openxmlformats.org/drawingml/2006/main">
             <a:pPr algn="ctr">
-              <a:defRPr sz="1350" b="1">
-                <a:solidFill>
-                  <a:srgbClr val="FFFFFF"/>
+              <a:defRPr sz="1125" b="1">
+                <a:solidFill>
+                  <a:srgbClr val="2C6E73"/>
                 </a:solidFill>
                 <a:latin typeface="Arial"/>
                 <a:ea typeface="Arial"/>
@@ -8336,9 +8338,9 @@
               </a:defRPr>
             </a:pPr>
             <a:r>
-              <a:rPr sz="1350" b="1">
-                <a:solidFill>
-                  <a:srgbClr val="FFFFFF"/>
+              <a:rPr sz="1125" b="1">
+                <a:solidFill>
+                  <a:srgbClr val="2C6E73"/>
                 </a:solidFill>
                 <a:latin typeface="Arial"/>
                 <a:ea typeface="Arial"/>
@@ -8354,19 +8356,19 @@
           <p:cNvPr id="13" name="">
             <a:extLst xmlns:a="http://schemas.openxmlformats.org/drawingml/2006/main">
               <a:ext uri="{FF2B5EF4-FFF2-40B4-BE49-F238E27FC236}">
-                <a16:creationId xmlns:a16="http://schemas.microsoft.com/office/drawing/2014/main" id="{E1479C64-31D4-436B-ABFB-2FD7CC8115BB}"/>
-              </a:ext>
-            </a:extLst>
-          </p:cNvPr>
-          <p:cNvSpPr>
-            <a:spLocks xmlns:a="http://schemas.openxmlformats.org/drawingml/2006/main" noGrp="1"/>
-          </p:cNvSpPr>
-          <p:nvPr/>
-        </p:nvSpPr>
-        <p:spPr>
-          <a:xfrm xmlns:a="http://schemas.openxmlformats.org/drawingml/2006/main">
-            <a:off x="1714500" y="2181225"/>
-            <a:ext cx="9429750" cy="609600"/>
+                <a16:creationId xmlns:a16="http://schemas.microsoft.com/office/drawing/2014/main" id="{F5F20820-67DA-4360-A71F-6001ABFAA8EC}"/>
+              </a:ext>
+            </a:extLst>
+          </p:cNvPr>
+          <p:cNvSpPr>
+            <a:spLocks xmlns:a="http://schemas.openxmlformats.org/drawingml/2006/main" noGrp="1"/>
+          </p:cNvSpPr>
+          <p:nvPr/>
+        </p:nvSpPr>
+        <p:spPr>
+          <a:xfrm xmlns:a="http://schemas.openxmlformats.org/drawingml/2006/main">
+            <a:off x="1714500" y="2114550"/>
+            <a:ext cx="9525000" cy="638175"/>
           </a:xfrm>
           <a:prstGeom xmlns:a="http://schemas.openxmlformats.org/drawingml/2006/main" prst="rect">
             <a:avLst/>
@@ -8383,7 +8385,7 @@
           <a:lstStyle xmlns:a="http://schemas.openxmlformats.org/drawingml/2006/main"/>
           <a:p xmlns:a="http://schemas.openxmlformats.org/drawingml/2006/main">
             <a:pPr algn="l">
-              <a:defRPr sz="1500" b="0">
+              <a:defRPr sz="1575" b="0">
                 <a:solidFill>
                   <a:srgbClr val="17253A"/>
                 </a:solidFill>
@@ -8393,7 +8395,7 @@
               </a:defRPr>
             </a:pPr>
             <a:r>
-              <a:rPr sz="1500" b="0">
+              <a:rPr sz="1575" b="0">
                 <a:solidFill>
                   <a:srgbClr val="17253A"/>
                 </a:solidFill>
@@ -8401,7 +8403,7 @@
                 <a:ea typeface="Arial"/>
                 <a:cs typeface="Arial"/>
               </a:rPr>
-              <a:t>Identify the structure: Identify what changes and what stays constant.</a:t>
+              <a:t>84, __, 62, __, 40</a:t>
             </a:r>
           </a:p>
         </p:txBody>
@@ -8411,28 +8413,30 @@
           <p:cNvPr id="14" name="">
             <a:extLst xmlns:a="http://schemas.openxmlformats.org/drawingml/2006/main">
               <a:ext uri="{FF2B5EF4-FFF2-40B4-BE49-F238E27FC236}">
-                <a16:creationId xmlns:a16="http://schemas.microsoft.com/office/drawing/2014/main" id="{172EACE1-A78A-45D0-AAB6-B82B6C73D7DA}"/>
-              </a:ext>
-            </a:extLst>
-          </p:cNvPr>
-          <p:cNvSpPr>
-            <a:spLocks xmlns:a="http://schemas.openxmlformats.org/drawingml/2006/main" noGrp="1"/>
-          </p:cNvSpPr>
-          <p:nvPr/>
-        </p:nvSpPr>
-        <p:spPr>
-          <a:xfrm xmlns:a="http://schemas.openxmlformats.org/drawingml/2006/main">
-            <a:off x="1000125" y="2990850"/>
-            <a:ext cx="476250" cy="476250"/>
-          </a:xfrm>
-          <a:prstGeom xmlns:a="http://schemas.openxmlformats.org/drawingml/2006/main" prst="ellipse">
+                <a16:creationId xmlns:a16="http://schemas.microsoft.com/office/drawing/2014/main" id="{48862DA2-D7BD-4CE3-8FF2-1CCD9F3574CF}"/>
+              </a:ext>
+            </a:extLst>
+          </p:cNvPr>
+          <p:cNvSpPr>
+            <a:spLocks xmlns:a="http://schemas.openxmlformats.org/drawingml/2006/main" noGrp="1"/>
+          </p:cNvSpPr>
+          <p:nvPr/>
+        </p:nvSpPr>
+        <p:spPr>
+          <a:xfrm xmlns:a="http://schemas.openxmlformats.org/drawingml/2006/main">
+            <a:off x="1714500" y="2771775"/>
+            <a:ext cx="9334500" cy="9525"/>
+          </a:xfrm>
+          <a:prstGeom xmlns:a="http://schemas.openxmlformats.org/drawingml/2006/main" prst="rect">
             <a:avLst/>
           </a:prstGeom>
           <a:solidFill xmlns:a="http://schemas.openxmlformats.org/drawingml/2006/main">
-            <a:srgbClr val="2C6E73"/>
+            <a:srgbClr val="D9E0E6"/>
           </a:solidFill>
           <a:ln xmlns:a="http://schemas.openxmlformats.org/drawingml/2006/main" w="0">
-            <a:noFill/>
+            <a:solidFill>
+              <a:srgbClr val="D9E0E6"/>
+            </a:solidFill>
           </a:ln>
         </p:spPr>
       </p:sp>
@@ -8441,19 +8445,19 @@
           <p:cNvPr id="15" name="">
             <a:extLst xmlns:a="http://schemas.openxmlformats.org/drawingml/2006/main">
               <a:ext uri="{FF2B5EF4-FFF2-40B4-BE49-F238E27FC236}">
-                <a16:creationId xmlns:a16="http://schemas.microsoft.com/office/drawing/2014/main" id="{F4E7BCEB-0646-4526-840A-9484C2C9E4F1}"/>
-              </a:ext>
-            </a:extLst>
-          </p:cNvPr>
-          <p:cNvSpPr>
-            <a:spLocks xmlns:a="http://schemas.openxmlformats.org/drawingml/2006/main" noGrp="1"/>
-          </p:cNvSpPr>
-          <p:nvPr/>
-        </p:nvSpPr>
-        <p:spPr>
-          <a:xfrm xmlns:a="http://schemas.openxmlformats.org/drawingml/2006/main">
-            <a:off x="1000125" y="3019425"/>
-            <a:ext cx="476250" cy="419100"/>
+                <a16:creationId xmlns:a16="http://schemas.microsoft.com/office/drawing/2014/main" id="{19219F03-B8D4-4315-AABB-CC6385276A61}"/>
+              </a:ext>
+            </a:extLst>
+          </p:cNvPr>
+          <p:cNvSpPr>
+            <a:spLocks xmlns:a="http://schemas.openxmlformats.org/drawingml/2006/main" noGrp="1"/>
+          </p:cNvSpPr>
+          <p:nvPr/>
+        </p:nvSpPr>
+        <p:spPr>
+          <a:xfrm xmlns:a="http://schemas.openxmlformats.org/drawingml/2006/main">
+            <a:off x="1162050" y="2905125"/>
+            <a:ext cx="400050" cy="400050"/>
           </a:xfrm>
           <a:prstGeom xmlns:a="http://schemas.openxmlformats.org/drawingml/2006/main" prst="rect">
             <a:avLst/>
@@ -8470,9 +8474,9 @@
           <a:lstStyle xmlns:a="http://schemas.openxmlformats.org/drawingml/2006/main"/>
           <a:p xmlns:a="http://schemas.openxmlformats.org/drawingml/2006/main">
             <a:pPr algn="ctr">
-              <a:defRPr sz="1350" b="1">
-                <a:solidFill>
-                  <a:srgbClr val="FFFFFF"/>
+              <a:defRPr sz="1125" b="1">
+                <a:solidFill>
+                  <a:srgbClr val="2C6E73"/>
                 </a:solidFill>
                 <a:latin typeface="Arial"/>
                 <a:ea typeface="Arial"/>
@@ -8480,9 +8484,9 @@
               </a:defRPr>
             </a:pPr>
             <a:r>
-              <a:rPr sz="1350" b="1">
-                <a:solidFill>
-                  <a:srgbClr val="FFFFFF"/>
+              <a:rPr sz="1125" b="1">
+                <a:solidFill>
+                  <a:srgbClr val="2C6E73"/>
                 </a:solidFill>
                 <a:latin typeface="Arial"/>
                 <a:ea typeface="Arial"/>
@@ -8498,19 +8502,19 @@
           <p:cNvPr id="16" name="">
             <a:extLst xmlns:a="http://schemas.openxmlformats.org/drawingml/2006/main">
               <a:ext uri="{FF2B5EF4-FFF2-40B4-BE49-F238E27FC236}">
-                <a16:creationId xmlns:a16="http://schemas.microsoft.com/office/drawing/2014/main" id="{E0144705-1EEE-4369-A1E3-2BDFE03DC0F9}"/>
-              </a:ext>
-            </a:extLst>
-          </p:cNvPr>
-          <p:cNvSpPr>
-            <a:spLocks xmlns:a="http://schemas.openxmlformats.org/drawingml/2006/main" noGrp="1"/>
-          </p:cNvSpPr>
-          <p:nvPr/>
-        </p:nvSpPr>
-        <p:spPr>
-          <a:xfrm xmlns:a="http://schemas.openxmlformats.org/drawingml/2006/main">
-            <a:off x="1714500" y="2924175"/>
-            <a:ext cx="9429750" cy="609600"/>
+                <a16:creationId xmlns:a16="http://schemas.microsoft.com/office/drawing/2014/main" id="{50D4AAE5-A454-475F-8724-FBB91A280C22}"/>
+              </a:ext>
+            </a:extLst>
+          </p:cNvPr>
+          <p:cNvSpPr>
+            <a:spLocks xmlns:a="http://schemas.openxmlformats.org/drawingml/2006/main" noGrp="1"/>
+          </p:cNvSpPr>
+          <p:nvPr/>
+        </p:nvSpPr>
+        <p:spPr>
+          <a:xfrm xmlns:a="http://schemas.openxmlformats.org/drawingml/2006/main">
+            <a:off x="1714500" y="2819400"/>
+            <a:ext cx="9525000" cy="638175"/>
           </a:xfrm>
           <a:prstGeom xmlns:a="http://schemas.openxmlformats.org/drawingml/2006/main" prst="rect">
             <a:avLst/>
@@ -8527,7 +8531,7 @@
           <a:lstStyle xmlns:a="http://schemas.openxmlformats.org/drawingml/2006/main"/>
           <a:p xmlns:a="http://schemas.openxmlformats.org/drawingml/2006/main">
             <a:pPr algn="l">
-              <a:defRPr sz="1500" b="0">
+              <a:defRPr sz="1575" b="0">
                 <a:solidFill>
                   <a:srgbClr val="17253A"/>
                 </a:solidFill>
@@ -8537,7 +8541,7 @@
               </a:defRPr>
             </a:pPr>
             <a:r>
-              <a:rPr sz="1500" b="0">
+              <a:rPr sz="1575" b="0">
                 <a:solidFill>
                   <a:srgbClr val="17253A"/>
                 </a:solidFill>
@@ -8545,7 +8549,7 @@
                 <a:ea typeface="Arial"/>
                 <a:cs typeface="Arial"/>
               </a:rPr>
-              <a:t>Set up the method: Express the relationship with words, a table or a formula.</a:t>
+              <a:t>84 to 62 is -22 over two equal steps</a:t>
             </a:r>
           </a:p>
         </p:txBody>
@@ -8555,28 +8559,30 @@
           <p:cNvPr id="17" name="">
             <a:extLst xmlns:a="http://schemas.openxmlformats.org/drawingml/2006/main">
               <a:ext uri="{FF2B5EF4-FFF2-40B4-BE49-F238E27FC236}">
-                <a16:creationId xmlns:a16="http://schemas.microsoft.com/office/drawing/2014/main" id="{4B79794D-BE08-49AC-9338-3D6400D41AC8}"/>
-              </a:ext>
-            </a:extLst>
-          </p:cNvPr>
-          <p:cNvSpPr>
-            <a:spLocks xmlns:a="http://schemas.openxmlformats.org/drawingml/2006/main" noGrp="1"/>
-          </p:cNvSpPr>
-          <p:nvPr/>
-        </p:nvSpPr>
-        <p:spPr>
-          <a:xfrm xmlns:a="http://schemas.openxmlformats.org/drawingml/2006/main">
-            <a:off x="1000125" y="3733800"/>
-            <a:ext cx="476250" cy="476250"/>
-          </a:xfrm>
-          <a:prstGeom xmlns:a="http://schemas.openxmlformats.org/drawingml/2006/main" prst="ellipse">
+                <a16:creationId xmlns:a16="http://schemas.microsoft.com/office/drawing/2014/main" id="{FDCCAFE7-670A-43D9-B3E3-F52FE3052EC9}"/>
+              </a:ext>
+            </a:extLst>
+          </p:cNvPr>
+          <p:cNvSpPr>
+            <a:spLocks xmlns:a="http://schemas.openxmlformats.org/drawingml/2006/main" noGrp="1"/>
+          </p:cNvSpPr>
+          <p:nvPr/>
+        </p:nvSpPr>
+        <p:spPr>
+          <a:xfrm xmlns:a="http://schemas.openxmlformats.org/drawingml/2006/main">
+            <a:off x="1714500" y="3476625"/>
+            <a:ext cx="9334500" cy="9525"/>
+          </a:xfrm>
+          <a:prstGeom xmlns:a="http://schemas.openxmlformats.org/drawingml/2006/main" prst="rect">
             <a:avLst/>
           </a:prstGeom>
           <a:solidFill xmlns:a="http://schemas.openxmlformats.org/drawingml/2006/main">
-            <a:srgbClr val="2C6E73"/>
+            <a:srgbClr val="D9E0E6"/>
           </a:solidFill>
           <a:ln xmlns:a="http://schemas.openxmlformats.org/drawingml/2006/main" w="0">
-            <a:noFill/>
+            <a:solidFill>
+              <a:srgbClr val="D9E0E6"/>
+            </a:solidFill>
           </a:ln>
         </p:spPr>
       </p:sp>
@@ -8585,19 +8591,19 @@
           <p:cNvPr id="18" name="">
             <a:extLst xmlns:a="http://schemas.openxmlformats.org/drawingml/2006/main">
               <a:ext uri="{FF2B5EF4-FFF2-40B4-BE49-F238E27FC236}">
-                <a16:creationId xmlns:a16="http://schemas.microsoft.com/office/drawing/2014/main" id="{0D8433B8-B326-4FA0-BDCD-80C9902E7DE8}"/>
-              </a:ext>
-            </a:extLst>
-          </p:cNvPr>
-          <p:cNvSpPr>
-            <a:spLocks xmlns:a="http://schemas.openxmlformats.org/drawingml/2006/main" noGrp="1"/>
-          </p:cNvSpPr>
-          <p:nvPr/>
-        </p:nvSpPr>
-        <p:spPr>
-          <a:xfrm xmlns:a="http://schemas.openxmlformats.org/drawingml/2006/main">
-            <a:off x="1000125" y="3762375"/>
-            <a:ext cx="476250" cy="419100"/>
+                <a16:creationId xmlns:a16="http://schemas.microsoft.com/office/drawing/2014/main" id="{5F12B644-DE0E-4BC2-A575-82DADA060EF8}"/>
+              </a:ext>
+            </a:extLst>
+          </p:cNvPr>
+          <p:cNvSpPr>
+            <a:spLocks xmlns:a="http://schemas.openxmlformats.org/drawingml/2006/main" noGrp="1"/>
+          </p:cNvSpPr>
+          <p:nvPr/>
+        </p:nvSpPr>
+        <p:spPr>
+          <a:xfrm xmlns:a="http://schemas.openxmlformats.org/drawingml/2006/main">
+            <a:off x="1162050" y="3609975"/>
+            <a:ext cx="400050" cy="400050"/>
           </a:xfrm>
           <a:prstGeom xmlns:a="http://schemas.openxmlformats.org/drawingml/2006/main" prst="rect">
             <a:avLst/>
@@ -8614,9 +8620,9 @@
           <a:lstStyle xmlns:a="http://schemas.openxmlformats.org/drawingml/2006/main"/>
           <a:p xmlns:a="http://schemas.openxmlformats.org/drawingml/2006/main">
             <a:pPr algn="ctr">
-              <a:defRPr sz="1350" b="1">
-                <a:solidFill>
-                  <a:srgbClr val="FFFFFF"/>
+              <a:defRPr sz="1125" b="1">
+                <a:solidFill>
+                  <a:srgbClr val="2C6E73"/>
                 </a:solidFill>
                 <a:latin typeface="Arial"/>
                 <a:ea typeface="Arial"/>
@@ -8624,9 +8630,9 @@
               </a:defRPr>
             </a:pPr>
             <a:r>
-              <a:rPr sz="1350" b="1">
-                <a:solidFill>
-                  <a:srgbClr val="FFFFFF"/>
+              <a:rPr sz="1125" b="1">
+                <a:solidFill>
+                  <a:srgbClr val="2C6E73"/>
                 </a:solidFill>
                 <a:latin typeface="Arial"/>
                 <a:ea typeface="Arial"/>
@@ -8642,19 +8648,19 @@
           <p:cNvPr id="19" name="">
             <a:extLst xmlns:a="http://schemas.openxmlformats.org/drawingml/2006/main">
               <a:ext uri="{FF2B5EF4-FFF2-40B4-BE49-F238E27FC236}">
-                <a16:creationId xmlns:a16="http://schemas.microsoft.com/office/drawing/2014/main" id="{A89D6DC0-B019-46DE-BF57-C4BFE241B37E}"/>
-              </a:ext>
-            </a:extLst>
-          </p:cNvPr>
-          <p:cNvSpPr>
-            <a:spLocks xmlns:a="http://schemas.openxmlformats.org/drawingml/2006/main" noGrp="1"/>
-          </p:cNvSpPr>
-          <p:nvPr/>
-        </p:nvSpPr>
-        <p:spPr>
-          <a:xfrm xmlns:a="http://schemas.openxmlformats.org/drawingml/2006/main">
-            <a:off x="1714500" y="3667125"/>
-            <a:ext cx="9429750" cy="609600"/>
+                <a16:creationId xmlns:a16="http://schemas.microsoft.com/office/drawing/2014/main" id="{271C9A89-F54B-4176-A69C-C4B34E2CC6EF}"/>
+              </a:ext>
+            </a:extLst>
+          </p:cNvPr>
+          <p:cNvSpPr>
+            <a:spLocks xmlns:a="http://schemas.openxmlformats.org/drawingml/2006/main" noGrp="1"/>
+          </p:cNvSpPr>
+          <p:nvPr/>
+        </p:nvSpPr>
+        <p:spPr>
+          <a:xfrm xmlns:a="http://schemas.openxmlformats.org/drawingml/2006/main">
+            <a:off x="1714500" y="3524250"/>
+            <a:ext cx="9525000" cy="638175"/>
           </a:xfrm>
           <a:prstGeom xmlns:a="http://schemas.openxmlformats.org/drawingml/2006/main" prst="rect">
             <a:avLst/>
@@ -8671,7 +8677,7 @@
           <a:lstStyle xmlns:a="http://schemas.openxmlformats.org/drawingml/2006/main"/>
           <a:p xmlns:a="http://schemas.openxmlformats.org/drawingml/2006/main">
             <a:pPr algn="l">
-              <a:defRPr sz="1500" b="0">
+              <a:defRPr sz="1575" b="0">
                 <a:solidFill>
                   <a:srgbClr val="17253A"/>
                 </a:solidFill>
@@ -8681,7 +8687,7 @@
               </a:defRPr>
             </a:pPr>
             <a:r>
-              <a:rPr sz="1500" b="0">
+              <a:rPr sz="1575" b="0">
                 <a:solidFill>
                   <a:srgbClr val="17253A"/>
                 </a:solidFill>
@@ -8689,7 +8695,7 @@
                 <a:ea typeface="Arial"/>
                 <a:cs typeface="Arial"/>
               </a:rPr>
-              <a:t>Complete the calculation: 73 and 51.</a:t>
+              <a:t>-22 ÷ 2 = -11 each step</a:t>
             </a:r>
           </a:p>
         </p:txBody>
@@ -8699,28 +8705,30 @@
           <p:cNvPr id="20" name="">
             <a:extLst xmlns:a="http://schemas.openxmlformats.org/drawingml/2006/main">
               <a:ext uri="{FF2B5EF4-FFF2-40B4-BE49-F238E27FC236}">
-                <a16:creationId xmlns:a16="http://schemas.microsoft.com/office/drawing/2014/main" id="{0D410CE2-C12D-4901-898F-7CE96A4C8F2B}"/>
-              </a:ext>
-            </a:extLst>
-          </p:cNvPr>
-          <p:cNvSpPr>
-            <a:spLocks xmlns:a="http://schemas.openxmlformats.org/drawingml/2006/main" noGrp="1"/>
-          </p:cNvSpPr>
-          <p:nvPr/>
-        </p:nvSpPr>
-        <p:spPr>
-          <a:xfrm xmlns:a="http://schemas.openxmlformats.org/drawingml/2006/main">
-            <a:off x="1000125" y="4476750"/>
-            <a:ext cx="476250" cy="476250"/>
-          </a:xfrm>
-          <a:prstGeom xmlns:a="http://schemas.openxmlformats.org/drawingml/2006/main" prst="ellipse">
+                <a16:creationId xmlns:a16="http://schemas.microsoft.com/office/drawing/2014/main" id="{3A003CA6-44CB-48A7-A5FD-1EAD1A150EB6}"/>
+              </a:ext>
+            </a:extLst>
+          </p:cNvPr>
+          <p:cNvSpPr>
+            <a:spLocks xmlns:a="http://schemas.openxmlformats.org/drawingml/2006/main" noGrp="1"/>
+          </p:cNvSpPr>
+          <p:nvPr/>
+        </p:nvSpPr>
+        <p:spPr>
+          <a:xfrm xmlns:a="http://schemas.openxmlformats.org/drawingml/2006/main">
+            <a:off x="1714500" y="4181475"/>
+            <a:ext cx="9334500" cy="9525"/>
+          </a:xfrm>
+          <a:prstGeom xmlns:a="http://schemas.openxmlformats.org/drawingml/2006/main" prst="rect">
             <a:avLst/>
           </a:prstGeom>
           <a:solidFill xmlns:a="http://schemas.openxmlformats.org/drawingml/2006/main">
-            <a:srgbClr val="2C6E73"/>
+            <a:srgbClr val="D9E0E6"/>
           </a:solidFill>
           <a:ln xmlns:a="http://schemas.openxmlformats.org/drawingml/2006/main" w="0">
-            <a:noFill/>
+            <a:solidFill>
+              <a:srgbClr val="D9E0E6"/>
+            </a:solidFill>
           </a:ln>
         </p:spPr>
       </p:sp>
@@ -8729,19 +8737,19 @@
           <p:cNvPr id="21" name="">
             <a:extLst xmlns:a="http://schemas.openxmlformats.org/drawingml/2006/main">
               <a:ext uri="{FF2B5EF4-FFF2-40B4-BE49-F238E27FC236}">
-                <a16:creationId xmlns:a16="http://schemas.microsoft.com/office/drawing/2014/main" id="{E344CFE8-5D5A-4D23-B5BD-854683EAF2F8}"/>
-              </a:ext>
-            </a:extLst>
-          </p:cNvPr>
-          <p:cNvSpPr>
-            <a:spLocks xmlns:a="http://schemas.openxmlformats.org/drawingml/2006/main" noGrp="1"/>
-          </p:cNvSpPr>
-          <p:nvPr/>
-        </p:nvSpPr>
-        <p:spPr>
-          <a:xfrm xmlns:a="http://schemas.openxmlformats.org/drawingml/2006/main">
-            <a:off x="1000125" y="4505325"/>
-            <a:ext cx="476250" cy="419100"/>
+                <a16:creationId xmlns:a16="http://schemas.microsoft.com/office/drawing/2014/main" id="{D2F4CBD3-6B0B-4046-93CA-616ED63457E4}"/>
+              </a:ext>
+            </a:extLst>
+          </p:cNvPr>
+          <p:cNvSpPr>
+            <a:spLocks xmlns:a="http://schemas.openxmlformats.org/drawingml/2006/main" noGrp="1"/>
+          </p:cNvSpPr>
+          <p:nvPr/>
+        </p:nvSpPr>
+        <p:spPr>
+          <a:xfrm xmlns:a="http://schemas.openxmlformats.org/drawingml/2006/main">
+            <a:off x="1162050" y="4314825"/>
+            <a:ext cx="400050" cy="400050"/>
           </a:xfrm>
           <a:prstGeom xmlns:a="http://schemas.openxmlformats.org/drawingml/2006/main" prst="rect">
             <a:avLst/>
@@ -8758,9 +8766,9 @@
           <a:lstStyle xmlns:a="http://schemas.openxmlformats.org/drawingml/2006/main"/>
           <a:p xmlns:a="http://schemas.openxmlformats.org/drawingml/2006/main">
             <a:pPr algn="ctr">
-              <a:defRPr sz="1350" b="1">
-                <a:solidFill>
-                  <a:srgbClr val="FFFFFF"/>
+              <a:defRPr sz="1125" b="1">
+                <a:solidFill>
+                  <a:srgbClr val="2C6E73"/>
                 </a:solidFill>
                 <a:latin typeface="Arial"/>
                 <a:ea typeface="Arial"/>
@@ -8768,9 +8776,9 @@
               </a:defRPr>
             </a:pPr>
             <a:r>
-              <a:rPr sz="1350" b="1">
-                <a:solidFill>
-                  <a:srgbClr val="FFFFFF"/>
+              <a:rPr sz="1125" b="1">
+                <a:solidFill>
+                  <a:srgbClr val="2C6E73"/>
                 </a:solidFill>
                 <a:latin typeface="Arial"/>
                 <a:ea typeface="Arial"/>
@@ -8786,19 +8794,19 @@
           <p:cNvPr id="22" name="">
             <a:extLst xmlns:a="http://schemas.openxmlformats.org/drawingml/2006/main">
               <a:ext uri="{FF2B5EF4-FFF2-40B4-BE49-F238E27FC236}">
-                <a16:creationId xmlns:a16="http://schemas.microsoft.com/office/drawing/2014/main" id="{DD94DC49-C756-4794-BF4B-8A654566D84E}"/>
-              </a:ext>
-            </a:extLst>
-          </p:cNvPr>
-          <p:cNvSpPr>
-            <a:spLocks xmlns:a="http://schemas.openxmlformats.org/drawingml/2006/main" noGrp="1"/>
-          </p:cNvSpPr>
-          <p:nvPr/>
-        </p:nvSpPr>
-        <p:spPr>
-          <a:xfrm xmlns:a="http://schemas.openxmlformats.org/drawingml/2006/main">
-            <a:off x="1714500" y="4410075"/>
-            <a:ext cx="9429750" cy="609600"/>
+                <a16:creationId xmlns:a16="http://schemas.microsoft.com/office/drawing/2014/main" id="{2D4EF358-5319-4424-9E07-80BE6D920C6E}"/>
+              </a:ext>
+            </a:extLst>
+          </p:cNvPr>
+          <p:cNvSpPr>
+            <a:spLocks xmlns:a="http://schemas.openxmlformats.org/drawingml/2006/main" noGrp="1"/>
+          </p:cNvSpPr>
+          <p:nvPr/>
+        </p:nvSpPr>
+        <p:spPr>
+          <a:xfrm xmlns:a="http://schemas.openxmlformats.org/drawingml/2006/main">
+            <a:off x="1714500" y="4229100"/>
+            <a:ext cx="9525000" cy="638175"/>
           </a:xfrm>
           <a:prstGeom xmlns:a="http://schemas.openxmlformats.org/drawingml/2006/main" prst="rect">
             <a:avLst/>
@@ -8815,9 +8823,9 @@
           <a:lstStyle xmlns:a="http://schemas.openxmlformats.org/drawingml/2006/main"/>
           <a:p xmlns:a="http://schemas.openxmlformats.org/drawingml/2006/main">
             <a:pPr algn="l">
-              <a:defRPr sz="1500" b="1">
-                <a:solidFill>
-                  <a:srgbClr val="2F785D"/>
+              <a:defRPr sz="1575" b="0">
+                <a:solidFill>
+                  <a:srgbClr val="17253A"/>
                 </a:solidFill>
                 <a:latin typeface="Arial"/>
                 <a:ea typeface="Arial"/>
@@ -8825,15 +8833,161 @@
               </a:defRPr>
             </a:pPr>
             <a:r>
-              <a:rPr sz="1500" b="1">
+              <a:rPr sz="1575" b="0">
+                <a:solidFill>
+                  <a:srgbClr val="17253A"/>
+                </a:solidFill>
+                <a:latin typeface="Arial"/>
+                <a:ea typeface="Arial"/>
+                <a:cs typeface="Arial"/>
+              </a:rPr>
+              <a:t>84, 73, 62, 51, 40</a:t>
+            </a:r>
+          </a:p>
+        </p:txBody>
+      </p:sp>
+      <p:sp>
+        <p:nvSpPr>
+          <p:cNvPr id="23" name="">
+            <a:extLst xmlns:a="http://schemas.openxmlformats.org/drawingml/2006/main">
+              <a:ext uri="{FF2B5EF4-FFF2-40B4-BE49-F238E27FC236}">
+                <a16:creationId xmlns:a16="http://schemas.microsoft.com/office/drawing/2014/main" id="{19DE36BA-0794-450A-AA0B-1716C37BAC55}"/>
+              </a:ext>
+            </a:extLst>
+          </p:cNvPr>
+          <p:cNvSpPr>
+            <a:spLocks xmlns:a="http://schemas.openxmlformats.org/drawingml/2006/main" noGrp="1"/>
+          </p:cNvSpPr>
+          <p:nvPr/>
+        </p:nvSpPr>
+        <p:spPr>
+          <a:xfrm xmlns:a="http://schemas.openxmlformats.org/drawingml/2006/main">
+            <a:off x="1714500" y="4886325"/>
+            <a:ext cx="9334500" cy="9525"/>
+          </a:xfrm>
+          <a:prstGeom xmlns:a="http://schemas.openxmlformats.org/drawingml/2006/main" prst="rect">
+            <a:avLst/>
+          </a:prstGeom>
+          <a:solidFill xmlns:a="http://schemas.openxmlformats.org/drawingml/2006/main">
+            <a:srgbClr val="D9E0E6"/>
+          </a:solidFill>
+          <a:ln xmlns:a="http://schemas.openxmlformats.org/drawingml/2006/main" w="0">
+            <a:solidFill>
+              <a:srgbClr val="D9E0E6"/>
+            </a:solidFill>
+          </a:ln>
+        </p:spPr>
+      </p:sp>
+      <p:sp>
+        <p:nvSpPr>
+          <p:cNvPr id="24" name="">
+            <a:extLst xmlns:a="http://schemas.openxmlformats.org/drawingml/2006/main">
+              <a:ext uri="{FF2B5EF4-FFF2-40B4-BE49-F238E27FC236}">
+                <a16:creationId xmlns:a16="http://schemas.microsoft.com/office/drawing/2014/main" id="{3FA6DEFB-BAB0-4F23-970E-D1A1A35B5F4E}"/>
+              </a:ext>
+            </a:extLst>
+          </p:cNvPr>
+          <p:cNvSpPr>
+            <a:spLocks xmlns:a="http://schemas.openxmlformats.org/drawingml/2006/main" noGrp="1"/>
+          </p:cNvSpPr>
+          <p:nvPr/>
+        </p:nvSpPr>
+        <p:spPr>
+          <a:xfrm xmlns:a="http://schemas.openxmlformats.org/drawingml/2006/main">
+            <a:off x="1162050" y="5019675"/>
+            <a:ext cx="400050" cy="400050"/>
+          </a:xfrm>
+          <a:prstGeom xmlns:a="http://schemas.openxmlformats.org/drawingml/2006/main" prst="rect">
+            <a:avLst/>
+          </a:prstGeom>
+          <a:noFill xmlns:a="http://schemas.openxmlformats.org/drawingml/2006/main"/>
+          <a:ln xmlns:a="http://schemas.openxmlformats.org/drawingml/2006/main" w="0">
+            <a:noFill/>
+          </a:ln>
+        </p:spPr>
+        <p:txBody>
+          <a:bodyPr xmlns:a="http://schemas.openxmlformats.org/drawingml/2006/main" anchor="ctr">
+            <a:normAutofit fontScale="100000"/>
+          </a:bodyPr>
+          <a:lstStyle xmlns:a="http://schemas.openxmlformats.org/drawingml/2006/main"/>
+          <a:p xmlns:a="http://schemas.openxmlformats.org/drawingml/2006/main">
+            <a:pPr algn="ctr">
+              <a:defRPr sz="1125" b="1">
                 <a:solidFill>
                   <a:srgbClr val="2F785D"/>
                 </a:solidFill>
                 <a:latin typeface="Arial"/>
                 <a:ea typeface="Arial"/>
                 <a:cs typeface="Arial"/>
+              </a:defRPr>
+            </a:pPr>
+            <a:r>
+              <a:rPr sz="1125" b="1">
+                <a:solidFill>
+                  <a:srgbClr val="2F785D"/>
+                </a:solidFill>
+                <a:latin typeface="Arial"/>
+                <a:ea typeface="Arial"/>
+                <a:cs typeface="Arial"/>
               </a:rPr>
-              <a:t>Check the result: Substitute carefully and check against known terms.</a:t>
+              <a:t>5</a:t>
+            </a:r>
+          </a:p>
+        </p:txBody>
+      </p:sp>
+      <p:sp>
+        <p:nvSpPr>
+          <p:cNvPr id="25" name="">
+            <a:extLst xmlns:a="http://schemas.openxmlformats.org/drawingml/2006/main">
+              <a:ext uri="{FF2B5EF4-FFF2-40B4-BE49-F238E27FC236}">
+                <a16:creationId xmlns:a16="http://schemas.microsoft.com/office/drawing/2014/main" id="{B8DEC0E9-24C9-45DC-800B-45E44AD40F94}"/>
+              </a:ext>
+            </a:extLst>
+          </p:cNvPr>
+          <p:cNvSpPr>
+            <a:spLocks xmlns:a="http://schemas.openxmlformats.org/drawingml/2006/main" noGrp="1"/>
+          </p:cNvSpPr>
+          <p:nvPr/>
+        </p:nvSpPr>
+        <p:spPr>
+          <a:xfrm xmlns:a="http://schemas.openxmlformats.org/drawingml/2006/main">
+            <a:off x="1714500" y="4933950"/>
+            <a:ext cx="9525000" cy="638175"/>
+          </a:xfrm>
+          <a:prstGeom xmlns:a="http://schemas.openxmlformats.org/drawingml/2006/main" prst="rect">
+            <a:avLst/>
+          </a:prstGeom>
+          <a:noFill xmlns:a="http://schemas.openxmlformats.org/drawingml/2006/main"/>
+          <a:ln xmlns:a="http://schemas.openxmlformats.org/drawingml/2006/main" w="0">
+            <a:noFill/>
+          </a:ln>
+        </p:spPr>
+        <p:txBody>
+          <a:bodyPr xmlns:a="http://schemas.openxmlformats.org/drawingml/2006/main" anchor="ctr">
+            <a:normAutofit fontScale="100000"/>
+          </a:bodyPr>
+          <a:lstStyle xmlns:a="http://schemas.openxmlformats.org/drawingml/2006/main"/>
+          <a:p xmlns:a="http://schemas.openxmlformats.org/drawingml/2006/main">
+            <a:pPr algn="l">
+              <a:defRPr sz="1575" b="1">
+                <a:solidFill>
+                  <a:srgbClr val="2F785D"/>
+                </a:solidFill>
+                <a:latin typeface="Arial"/>
+                <a:ea typeface="Arial"/>
+                <a:cs typeface="Arial"/>
+              </a:defRPr>
+            </a:pPr>
+            <a:r>
+              <a:rPr sz="1575" b="1">
+                <a:solidFill>
+                  <a:srgbClr val="2F785D"/>
+                </a:solidFill>
+                <a:latin typeface="Arial"/>
+                <a:ea typeface="Arial"/>
+                <a:cs typeface="Arial"/>
+              </a:rPr>
+              <a:t>Missing terms: 73 and 51</a:t>
             </a:r>
           </a:p>
         </p:txBody>
@@ -8841,7 +8995,7 @@
     </p:spTree>
     <p:extLst>
       <p:ext uri="{BB962C8B-B14F-4D97-AF65-F5344CB8AC3E}">
-        <p14:creationId xmlns:p14="http://schemas.microsoft.com/office/powerpoint/2010/main" val="782716122"/>
+        <p14:creationId xmlns:p14="http://schemas.microsoft.com/office/powerpoint/2010/main" val="1387714410"/>
       </p:ext>
     </p:extLst>
   </p:cSld>
@@ -9078,6 +9232,51 @@
                       </p:childTnLst>
                     </p:cTn>
                   </p:par>
+                  <p:par>
+                    <p:cTn id="23" fill="hold">
+                      <p:stCondLst>
+                        <p:cond delay="indefinite"/>
+                      </p:stCondLst>
+                      <p:childTnLst>
+                        <p:par>
+                          <p:cTn id="24" fill="hold">
+                            <p:stCondLst>
+                              <p:cond delay="0"/>
+                            </p:stCondLst>
+                            <p:childTnLst>
+                              <p:par>
+                                <p:cTn id="25" presetID="1" presetClass="entr" presetSubtype="0" fill="hold" grpId="0" nodeType="clickEffect">
+                                  <p:stCondLst>
+                                    <p:cond delay="0"/>
+                                  </p:stCondLst>
+                                  <p:childTnLst>
+                                    <p:set>
+                                      <p:cBhvr>
+                                        <p:cTn id="26" dur="1" fill="hold">
+                                          <p:stCondLst>
+                                            <p:cond delay="0"/>
+                                          </p:stCondLst>
+                                        </p:cTn>
+                                        <p:tgtEl>
+                                          <p:spTgt spid="25"/>
+                                        </p:tgtEl>
+                                        <p:attrNameLst>
+                                          <p:attrName>style.visibility</p:attrName>
+                                        </p:attrNameLst>
+                                      </p:cBhvr>
+                                      <p:to>
+                                        <p:strVal val="visible"/>
+                                      </p:to>
+                                    </p:set>
+                                  </p:childTnLst>
+                                </p:cTn>
+                              </p:par>
+                            </p:childTnLst>
+                          </p:cTn>
+                        </p:par>
+                      </p:childTnLst>
+                    </p:cTn>
+                  </p:par>
                 </p:childTnLst>
               </p:cTn>
               <p:prevCondLst>
@@ -9105,6 +9304,7 @@
       <p:bldP spid="16" grpId="0"/>
       <p:bldP spid="19" grpId="0"/>
       <p:bldP spid="22" grpId="0"/>
+      <p:bldP spid="25" grpId="0"/>
     </p:bldLst>
   </p:timing>
 </p:sld>
@@ -9134,7 +9334,7 @@
           <p:cNvPr id="15" name="">
             <a:extLst xmlns:a="http://schemas.openxmlformats.org/drawingml/2006/main">
               <a:ext uri="{FF2B5EF4-FFF2-40B4-BE49-F238E27FC236}">
-                <a16:creationId xmlns:a16="http://schemas.microsoft.com/office/drawing/2014/main" id="{03076155-E33E-4132-9BFC-53A60D4C793A}"/>
+                <a16:creationId xmlns:a16="http://schemas.microsoft.com/office/drawing/2014/main" id="{8C43A10B-5A2D-4888-9E4D-3A7AE56B1EF2}"/>
               </a:ext>
             </a:extLst>
           </p:cNvPr>
@@ -9166,7 +9366,7 @@
           <p:cNvPr id="2" name="">
             <a:extLst xmlns:a="http://schemas.openxmlformats.org/drawingml/2006/main">
               <a:ext uri="{FF2B5EF4-FFF2-40B4-BE49-F238E27FC236}">
-                <a16:creationId xmlns:a16="http://schemas.microsoft.com/office/drawing/2014/main" id="{E792F73C-B63D-4856-A230-5C8845474D2D}"/>
+                <a16:creationId xmlns:a16="http://schemas.microsoft.com/office/drawing/2014/main" id="{C70A75C2-BCF7-4251-98C2-EB0DF500052E}"/>
               </a:ext>
             </a:extLst>
           </p:cNvPr>
@@ -9223,7 +9423,7 @@
           <p:cNvPr id="3" name="">
             <a:extLst xmlns:a="http://schemas.openxmlformats.org/drawingml/2006/main">
               <a:ext uri="{FF2B5EF4-FFF2-40B4-BE49-F238E27FC236}">
-                <a16:creationId xmlns:a16="http://schemas.microsoft.com/office/drawing/2014/main" id="{168D8C90-E343-4FB9-B739-5996D414842A}"/>
+                <a16:creationId xmlns:a16="http://schemas.microsoft.com/office/drawing/2014/main" id="{824BC2ED-489C-44B6-98EF-237B01275D97}"/>
               </a:ext>
             </a:extLst>
           </p:cNvPr>
@@ -9255,7 +9455,7 @@
           <p:cNvPr id="4" name="">
             <a:extLst xmlns:a="http://schemas.openxmlformats.org/drawingml/2006/main">
               <a:ext uri="{FF2B5EF4-FFF2-40B4-BE49-F238E27FC236}">
-                <a16:creationId xmlns:a16="http://schemas.microsoft.com/office/drawing/2014/main" id="{04DBA8BE-2C8A-47B4-8190-5D31A9B56076}"/>
+                <a16:creationId xmlns:a16="http://schemas.microsoft.com/office/drawing/2014/main" id="{99459D38-7235-4160-8C99-1175951F224C}"/>
               </a:ext>
             </a:extLst>
           </p:cNvPr>
@@ -9312,7 +9512,7 @@
           <p:cNvPr id="5" name="">
             <a:extLst xmlns:a="http://schemas.openxmlformats.org/drawingml/2006/main">
               <a:ext uri="{FF2B5EF4-FFF2-40B4-BE49-F238E27FC236}">
-                <a16:creationId xmlns:a16="http://schemas.microsoft.com/office/drawing/2014/main" id="{48D82E04-891A-4F69-AE29-53A7F50553A0}"/>
+                <a16:creationId xmlns:a16="http://schemas.microsoft.com/office/drawing/2014/main" id="{4CBE0824-7587-417A-ADB6-A683BD59A400}"/>
               </a:ext>
             </a:extLst>
           </p:cNvPr>
@@ -9369,7 +9569,7 @@
           <p:cNvPr id="6" name="">
             <a:extLst xmlns:a="http://schemas.openxmlformats.org/drawingml/2006/main">
               <a:ext uri="{FF2B5EF4-FFF2-40B4-BE49-F238E27FC236}">
-                <a16:creationId xmlns:a16="http://schemas.microsoft.com/office/drawing/2014/main" id="{0635A5BC-6E11-407B-BEF4-92AE9D4F7BE0}"/>
+                <a16:creationId xmlns:a16="http://schemas.microsoft.com/office/drawing/2014/main" id="{47D6EB7A-FD7C-402B-B14F-2A87879BE393}"/>
               </a:ext>
             </a:extLst>
           </p:cNvPr>
@@ -9426,7 +9626,7 @@
           <p:cNvPr id="7" name="">
             <a:extLst xmlns:a="http://schemas.openxmlformats.org/drawingml/2006/main">
               <a:ext uri="{FF2B5EF4-FFF2-40B4-BE49-F238E27FC236}">
-                <a16:creationId xmlns:a16="http://schemas.microsoft.com/office/drawing/2014/main" id="{62345B4B-A989-44D9-8C28-48D576C87DBA}"/>
+                <a16:creationId xmlns:a16="http://schemas.microsoft.com/office/drawing/2014/main" id="{320977D4-EAF3-4AD4-A25F-E786D5FC861C}"/>
               </a:ext>
             </a:extLst>
           </p:cNvPr>
@@ -9458,7 +9658,7 @@
           <p:cNvPr id="8" name="">
             <a:extLst xmlns:a="http://schemas.openxmlformats.org/drawingml/2006/main">
               <a:ext uri="{FF2B5EF4-FFF2-40B4-BE49-F238E27FC236}">
-                <a16:creationId xmlns:a16="http://schemas.microsoft.com/office/drawing/2014/main" id="{A3806993-A7AC-41B0-AF47-0B5FA1EBE099}"/>
+                <a16:creationId xmlns:a16="http://schemas.microsoft.com/office/drawing/2014/main" id="{4C5E9BD6-074D-4039-BB54-7D8B8B782648}"/>
               </a:ext>
             </a:extLst>
           </p:cNvPr>
@@ -9515,7 +9715,7 @@
           <p:cNvPr id="9" name="">
             <a:extLst xmlns:a="http://schemas.openxmlformats.org/drawingml/2006/main">
               <a:ext uri="{FF2B5EF4-FFF2-40B4-BE49-F238E27FC236}">
-                <a16:creationId xmlns:a16="http://schemas.microsoft.com/office/drawing/2014/main" id="{E563876F-095E-4150-91ED-2F8D87EB8FC8}"/>
+                <a16:creationId xmlns:a16="http://schemas.microsoft.com/office/drawing/2014/main" id="{DB8D4095-BEDD-41F1-8986-C458D9782628}"/>
               </a:ext>
             </a:extLst>
           </p:cNvPr>
@@ -9572,7 +9772,7 @@
           <p:cNvPr id="10" name="">
             <a:extLst xmlns:a="http://schemas.openxmlformats.org/drawingml/2006/main">
               <a:ext uri="{FF2B5EF4-FFF2-40B4-BE49-F238E27FC236}">
-                <a16:creationId xmlns:a16="http://schemas.microsoft.com/office/drawing/2014/main" id="{4C23163A-B09A-4D80-B9CB-37C1D84225F9}"/>
+                <a16:creationId xmlns:a16="http://schemas.microsoft.com/office/drawing/2014/main" id="{EBFF7036-DF40-462C-9EE1-00A14F27A1B0}"/>
               </a:ext>
             </a:extLst>
           </p:cNvPr>
@@ -9629,7 +9829,7 @@
           <p:cNvPr id="11" name="">
             <a:extLst xmlns:a="http://schemas.openxmlformats.org/drawingml/2006/main">
               <a:ext uri="{FF2B5EF4-FFF2-40B4-BE49-F238E27FC236}">
-                <a16:creationId xmlns:a16="http://schemas.microsoft.com/office/drawing/2014/main" id="{D1103907-BD1A-45E7-A60D-EB4F65310EB9}"/>
+                <a16:creationId xmlns:a16="http://schemas.microsoft.com/office/drawing/2014/main" id="{D4E37E07-B29A-487E-BC46-7458BA976C08}"/>
               </a:ext>
             </a:extLst>
           </p:cNvPr>
@@ -9686,7 +9886,7 @@
           <p:cNvPr id="12" name="">
             <a:extLst xmlns:a="http://schemas.openxmlformats.org/drawingml/2006/main">
               <a:ext uri="{FF2B5EF4-FFF2-40B4-BE49-F238E27FC236}">
-                <a16:creationId xmlns:a16="http://schemas.microsoft.com/office/drawing/2014/main" id="{30757D76-906F-4210-B2FD-8BA26FDC473F}"/>
+                <a16:creationId xmlns:a16="http://schemas.microsoft.com/office/drawing/2014/main" id="{531B3796-63F3-49A6-BB5A-992E98632E3E}"/>
               </a:ext>
             </a:extLst>
           </p:cNvPr>
@@ -9718,7 +9918,7 @@
           <p:cNvPr id="13" name="">
             <a:extLst xmlns:a="http://schemas.openxmlformats.org/drawingml/2006/main">
               <a:ext uri="{FF2B5EF4-FFF2-40B4-BE49-F238E27FC236}">
-                <a16:creationId xmlns:a16="http://schemas.microsoft.com/office/drawing/2014/main" id="{FB2EF31A-89F4-4FB5-B1DE-8F63CB2FC9CE}"/>
+                <a16:creationId xmlns:a16="http://schemas.microsoft.com/office/drawing/2014/main" id="{C303AD7F-368E-40EF-A198-0BF7A5BD9F35}"/>
               </a:ext>
             </a:extLst>
           </p:cNvPr>
@@ -9775,7 +9975,7 @@
           <p:cNvPr id="14" name="">
             <a:extLst xmlns:a="http://schemas.openxmlformats.org/drawingml/2006/main">
               <a:ext uri="{FF2B5EF4-FFF2-40B4-BE49-F238E27FC236}">
-                <a16:creationId xmlns:a16="http://schemas.microsoft.com/office/drawing/2014/main" id="{7F561BB4-A2BB-44A8-B0B5-441C8569797B}"/>
+                <a16:creationId xmlns:a16="http://schemas.microsoft.com/office/drawing/2014/main" id="{2344193E-4844-41CA-BB68-1F56DA45555E}"/>
               </a:ext>
             </a:extLst>
           </p:cNvPr>
@@ -9830,7 +10030,7 @@
     </p:spTree>
     <p:extLst>
       <p:ext uri="{BB962C8B-B14F-4D97-AF65-F5344CB8AC3E}">
-        <p14:creationId xmlns:p14="http://schemas.microsoft.com/office/powerpoint/2010/main" val="846919538"/>
+        <p14:creationId xmlns:p14="http://schemas.microsoft.com/office/powerpoint/2010/main" val="280941870"/>
       </p:ext>
     </p:extLst>
   </p:cSld>
@@ -10031,7 +10231,7 @@
           <p:cNvPr id="16" name="">
             <a:extLst xmlns:a="http://schemas.openxmlformats.org/drawingml/2006/main">
               <a:ext uri="{FF2B5EF4-FFF2-40B4-BE49-F238E27FC236}">
-                <a16:creationId xmlns:a16="http://schemas.microsoft.com/office/drawing/2014/main" id="{4816DBA4-801C-4F37-97A8-CC5C6DAFEEF0}"/>
+                <a16:creationId xmlns:a16="http://schemas.microsoft.com/office/drawing/2014/main" id="{A564DB4E-3D58-46B1-95D9-E3F4024C4E65}"/>
               </a:ext>
             </a:extLst>
           </p:cNvPr>
@@ -10063,7 +10263,7 @@
           <p:cNvPr id="2" name="">
             <a:extLst xmlns:a="http://schemas.openxmlformats.org/drawingml/2006/main">
               <a:ext uri="{FF2B5EF4-FFF2-40B4-BE49-F238E27FC236}">
-                <a16:creationId xmlns:a16="http://schemas.microsoft.com/office/drawing/2014/main" id="{AD8645F8-3277-4926-8620-BE1A14ED1AF0}"/>
+                <a16:creationId xmlns:a16="http://schemas.microsoft.com/office/drawing/2014/main" id="{4A291C7F-1A97-410A-A093-C121E46BA1FC}"/>
               </a:ext>
             </a:extLst>
           </p:cNvPr>
@@ -10120,7 +10320,7 @@
           <p:cNvPr id="3" name="">
             <a:extLst xmlns:a="http://schemas.openxmlformats.org/drawingml/2006/main">
               <a:ext uri="{FF2B5EF4-FFF2-40B4-BE49-F238E27FC236}">
-                <a16:creationId xmlns:a16="http://schemas.microsoft.com/office/drawing/2014/main" id="{3F58AD94-C7F5-4003-A31F-E6E817393EA9}"/>
+                <a16:creationId xmlns:a16="http://schemas.microsoft.com/office/drawing/2014/main" id="{6986D85C-F90C-4D23-B853-9B17E9E8C453}"/>
               </a:ext>
             </a:extLst>
           </p:cNvPr>
@@ -10152,7 +10352,7 @@
           <p:cNvPr id="4" name="">
             <a:extLst xmlns:a="http://schemas.openxmlformats.org/drawingml/2006/main">
               <a:ext uri="{FF2B5EF4-FFF2-40B4-BE49-F238E27FC236}">
-                <a16:creationId xmlns:a16="http://schemas.microsoft.com/office/drawing/2014/main" id="{F26F305B-14DA-48C6-9DC2-E4CAB7AE392A}"/>
+                <a16:creationId xmlns:a16="http://schemas.microsoft.com/office/drawing/2014/main" id="{A3C70804-E9DA-443C-96DD-57A424390533}"/>
               </a:ext>
             </a:extLst>
           </p:cNvPr>
@@ -10209,7 +10409,7 @@
           <p:cNvPr id="5" name="">
             <a:extLst xmlns:a="http://schemas.openxmlformats.org/drawingml/2006/main">
               <a:ext uri="{FF2B5EF4-FFF2-40B4-BE49-F238E27FC236}">
-                <a16:creationId xmlns:a16="http://schemas.microsoft.com/office/drawing/2014/main" id="{BD280BB7-1DAC-4023-B667-65A8EC17EC8D}"/>
+                <a16:creationId xmlns:a16="http://schemas.microsoft.com/office/drawing/2014/main" id="{BBB0E664-438F-47F7-8FE6-06E4DDEB581C}"/>
               </a:ext>
             </a:extLst>
           </p:cNvPr>
@@ -10266,7 +10466,7 @@
           <p:cNvPr id="6" name="">
             <a:extLst xmlns:a="http://schemas.openxmlformats.org/drawingml/2006/main">
               <a:ext uri="{FF2B5EF4-FFF2-40B4-BE49-F238E27FC236}">
-                <a16:creationId xmlns:a16="http://schemas.microsoft.com/office/drawing/2014/main" id="{BE05B7B4-53D4-4F88-A53D-B607FF186BF8}"/>
+                <a16:creationId xmlns:a16="http://schemas.microsoft.com/office/drawing/2014/main" id="{99566085-83DE-4C6C-B343-511241305998}"/>
               </a:ext>
             </a:extLst>
           </p:cNvPr>
@@ -10323,7 +10523,7 @@
           <p:cNvPr id="7" name="">
             <a:extLst xmlns:a="http://schemas.openxmlformats.org/drawingml/2006/main">
               <a:ext uri="{FF2B5EF4-FFF2-40B4-BE49-F238E27FC236}">
-                <a16:creationId xmlns:a16="http://schemas.microsoft.com/office/drawing/2014/main" id="{FA01908C-E935-400E-A540-F686703F4BC0}"/>
+                <a16:creationId xmlns:a16="http://schemas.microsoft.com/office/drawing/2014/main" id="{74864E6B-403C-49F9-BCE5-FEEE4575D8B5}"/>
               </a:ext>
             </a:extLst>
           </p:cNvPr>
@@ -10355,7 +10555,7 @@
           <p:cNvPr id="8" name="">
             <a:extLst xmlns:a="http://schemas.openxmlformats.org/drawingml/2006/main">
               <a:ext uri="{FF2B5EF4-FFF2-40B4-BE49-F238E27FC236}">
-                <a16:creationId xmlns:a16="http://schemas.microsoft.com/office/drawing/2014/main" id="{A3920C2E-BBE3-407D-8297-20917122141F}"/>
+                <a16:creationId xmlns:a16="http://schemas.microsoft.com/office/drawing/2014/main" id="{384D06BD-902E-4D64-9DC8-5CC3A2E15649}"/>
               </a:ext>
             </a:extLst>
           </p:cNvPr>
@@ -10412,7 +10612,7 @@
           <p:cNvPr id="9" name="">
             <a:extLst xmlns:a="http://schemas.openxmlformats.org/drawingml/2006/main">
               <a:ext uri="{FF2B5EF4-FFF2-40B4-BE49-F238E27FC236}">
-                <a16:creationId xmlns:a16="http://schemas.microsoft.com/office/drawing/2014/main" id="{FDDDB56F-667E-4D05-AA40-386C2FFBE647}"/>
+                <a16:creationId xmlns:a16="http://schemas.microsoft.com/office/drawing/2014/main" id="{319400E8-CE1E-410A-B909-5CC5A2ED8B0A}"/>
               </a:ext>
             </a:extLst>
           </p:cNvPr>
@@ -10469,7 +10669,7 @@
           <p:cNvPr id="10" name="">
             <a:extLst xmlns:a="http://schemas.openxmlformats.org/drawingml/2006/main">
               <a:ext uri="{FF2B5EF4-FFF2-40B4-BE49-F238E27FC236}">
-                <a16:creationId xmlns:a16="http://schemas.microsoft.com/office/drawing/2014/main" id="{EBA26730-4AF3-4F84-9F22-B708DAA70155}"/>
+                <a16:creationId xmlns:a16="http://schemas.microsoft.com/office/drawing/2014/main" id="{965122E2-404D-442E-9DDD-1BA3A4F55EA5}"/>
               </a:ext>
             </a:extLst>
           </p:cNvPr>
@@ -10526,7 +10726,7 @@
           <p:cNvPr id="11" name="">
             <a:extLst xmlns:a="http://schemas.openxmlformats.org/drawingml/2006/main">
               <a:ext uri="{FF2B5EF4-FFF2-40B4-BE49-F238E27FC236}">
-                <a16:creationId xmlns:a16="http://schemas.microsoft.com/office/drawing/2014/main" id="{4CA8D8BD-C41E-4801-BD17-E5725B9A1B9E}"/>
+                <a16:creationId xmlns:a16="http://schemas.microsoft.com/office/drawing/2014/main" id="{B8878138-067F-447F-8FEF-9C11CA856244}"/>
               </a:ext>
             </a:extLst>
           </p:cNvPr>
@@ -10583,7 +10783,7 @@
           <p:cNvPr id="12" name="">
             <a:extLst xmlns:a="http://schemas.openxmlformats.org/drawingml/2006/main">
               <a:ext uri="{FF2B5EF4-FFF2-40B4-BE49-F238E27FC236}">
-                <a16:creationId xmlns:a16="http://schemas.microsoft.com/office/drawing/2014/main" id="{7DCC9152-7C8B-4909-8378-7CED01AFB0C3}"/>
+                <a16:creationId xmlns:a16="http://schemas.microsoft.com/office/drawing/2014/main" id="{D6F3462B-9F60-4C89-BEDC-25CD14B57A8B}"/>
               </a:ext>
             </a:extLst>
           </p:cNvPr>
@@ -10640,7 +10840,7 @@
           <p:cNvPr id="13" name="">
             <a:extLst xmlns:a="http://schemas.openxmlformats.org/drawingml/2006/main">
               <a:ext uri="{FF2B5EF4-FFF2-40B4-BE49-F238E27FC236}">
-                <a16:creationId xmlns:a16="http://schemas.microsoft.com/office/drawing/2014/main" id="{CD87C9F8-D5E3-43F1-978B-E67AE47A3A59}"/>
+                <a16:creationId xmlns:a16="http://schemas.microsoft.com/office/drawing/2014/main" id="{8848D778-317E-4C88-9026-03D76F1E4B12}"/>
               </a:ext>
             </a:extLst>
           </p:cNvPr>
@@ -10697,7 +10897,7 @@
           <p:cNvPr id="14" name="">
             <a:extLst xmlns:a="http://schemas.openxmlformats.org/drawingml/2006/main">
               <a:ext uri="{FF2B5EF4-FFF2-40B4-BE49-F238E27FC236}">
-                <a16:creationId xmlns:a16="http://schemas.microsoft.com/office/drawing/2014/main" id="{25DF82B0-F983-4D30-9445-83BB9052FCBD}"/>
+                <a16:creationId xmlns:a16="http://schemas.microsoft.com/office/drawing/2014/main" id="{8CA2FD5D-7953-4ADF-8464-25F1BF9BB30F}"/>
               </a:ext>
             </a:extLst>
           </p:cNvPr>
@@ -10754,7 +10954,7 @@
           <p:cNvPr id="15" name="">
             <a:extLst xmlns:a="http://schemas.openxmlformats.org/drawingml/2006/main">
               <a:ext uri="{FF2B5EF4-FFF2-40B4-BE49-F238E27FC236}">
-                <a16:creationId xmlns:a16="http://schemas.microsoft.com/office/drawing/2014/main" id="{216FB157-B5D2-4F4F-99DD-E2F0CFE610F8}"/>
+                <a16:creationId xmlns:a16="http://schemas.microsoft.com/office/drawing/2014/main" id="{4505D2B6-FDE9-4142-8F64-66DF4AEBE66B}"/>
               </a:ext>
             </a:extLst>
           </p:cNvPr>
@@ -10809,7 +11009,7 @@
     </p:spTree>
     <p:extLst>
       <p:ext uri="{BB962C8B-B14F-4D97-AF65-F5344CB8AC3E}">
-        <p14:creationId xmlns:p14="http://schemas.microsoft.com/office/powerpoint/2010/main" val="1338862757"/>
+        <p14:creationId xmlns:p14="http://schemas.microsoft.com/office/powerpoint/2010/main" val="383484329"/>
       </p:ext>
     </p:extLst>
   </p:cSld>
@@ -10964,7 +11164,7 @@
           <p:cNvPr id="16" name="">
             <a:extLst xmlns:a="http://schemas.openxmlformats.org/drawingml/2006/main">
               <a:ext uri="{FF2B5EF4-FFF2-40B4-BE49-F238E27FC236}">
-                <a16:creationId xmlns:a16="http://schemas.microsoft.com/office/drawing/2014/main" id="{E12E5A8E-CBF9-450A-8F2B-E560E270A54F}"/>
+                <a16:creationId xmlns:a16="http://schemas.microsoft.com/office/drawing/2014/main" id="{911CC773-BC0C-47DE-8BC7-02E32F567CBA}"/>
               </a:ext>
             </a:extLst>
           </p:cNvPr>
@@ -10996,7 +11196,7 @@
           <p:cNvPr id="2" name="">
             <a:extLst xmlns:a="http://schemas.openxmlformats.org/drawingml/2006/main">
               <a:ext uri="{FF2B5EF4-FFF2-40B4-BE49-F238E27FC236}">
-                <a16:creationId xmlns:a16="http://schemas.microsoft.com/office/drawing/2014/main" id="{18B33AED-06E3-4C84-9217-846F0D092403}"/>
+                <a16:creationId xmlns:a16="http://schemas.microsoft.com/office/drawing/2014/main" id="{8E122CD7-9C48-4DFA-92DE-F79C20EF54B5}"/>
               </a:ext>
             </a:extLst>
           </p:cNvPr>
@@ -11053,7 +11253,7 @@
           <p:cNvPr id="3" name="">
             <a:extLst xmlns:a="http://schemas.openxmlformats.org/drawingml/2006/main">
               <a:ext uri="{FF2B5EF4-FFF2-40B4-BE49-F238E27FC236}">
-                <a16:creationId xmlns:a16="http://schemas.microsoft.com/office/drawing/2014/main" id="{AB6991B8-8684-4879-A7EF-9AF76DDB73B9}"/>
+                <a16:creationId xmlns:a16="http://schemas.microsoft.com/office/drawing/2014/main" id="{EE848CAE-AF00-4092-A519-776E136739E9}"/>
               </a:ext>
             </a:extLst>
           </p:cNvPr>
@@ -11085,7 +11285,7 @@
           <p:cNvPr id="4" name="">
             <a:extLst xmlns:a="http://schemas.openxmlformats.org/drawingml/2006/main">
               <a:ext uri="{FF2B5EF4-FFF2-40B4-BE49-F238E27FC236}">
-                <a16:creationId xmlns:a16="http://schemas.microsoft.com/office/drawing/2014/main" id="{9B528E0D-0278-435F-95FA-200AAF3BDC7C}"/>
+                <a16:creationId xmlns:a16="http://schemas.microsoft.com/office/drawing/2014/main" id="{3B15FE48-0127-4426-9AFE-253209ECC24B}"/>
               </a:ext>
             </a:extLst>
           </p:cNvPr>
@@ -11142,7 +11342,7 @@
           <p:cNvPr id="5" name="">
             <a:extLst xmlns:a="http://schemas.openxmlformats.org/drawingml/2006/main">
               <a:ext uri="{FF2B5EF4-FFF2-40B4-BE49-F238E27FC236}">
-                <a16:creationId xmlns:a16="http://schemas.microsoft.com/office/drawing/2014/main" id="{3BB07CAF-203C-4287-B6FF-12F8C1F1D175}"/>
+                <a16:creationId xmlns:a16="http://schemas.microsoft.com/office/drawing/2014/main" id="{15C07C80-8906-489A-AC70-9411EB5AEE73}"/>
               </a:ext>
             </a:extLst>
           </p:cNvPr>
@@ -11199,7 +11399,7 @@
           <p:cNvPr id="6" name="">
             <a:extLst xmlns:a="http://schemas.openxmlformats.org/drawingml/2006/main">
               <a:ext uri="{FF2B5EF4-FFF2-40B4-BE49-F238E27FC236}">
-                <a16:creationId xmlns:a16="http://schemas.microsoft.com/office/drawing/2014/main" id="{C3A3054C-EC8F-42FD-8C40-C2685434555E}"/>
+                <a16:creationId xmlns:a16="http://schemas.microsoft.com/office/drawing/2014/main" id="{EB3BD674-2314-4426-B8EF-E8A0ED703452}"/>
               </a:ext>
             </a:extLst>
           </p:cNvPr>
@@ -11256,7 +11456,7 @@
           <p:cNvPr id="7" name="">
             <a:extLst xmlns:a="http://schemas.openxmlformats.org/drawingml/2006/main">
               <a:ext uri="{FF2B5EF4-FFF2-40B4-BE49-F238E27FC236}">
-                <a16:creationId xmlns:a16="http://schemas.microsoft.com/office/drawing/2014/main" id="{8818EC33-D123-4B5E-A9FD-944E12605369}"/>
+                <a16:creationId xmlns:a16="http://schemas.microsoft.com/office/drawing/2014/main" id="{F99A4B4C-ECDD-41D3-8125-1A93ADE7476F}"/>
               </a:ext>
             </a:extLst>
           </p:cNvPr>
@@ -11288,7 +11488,7 @@
           <p:cNvPr id="8" name="">
             <a:extLst xmlns:a="http://schemas.openxmlformats.org/drawingml/2006/main">
               <a:ext uri="{FF2B5EF4-FFF2-40B4-BE49-F238E27FC236}">
-                <a16:creationId xmlns:a16="http://schemas.microsoft.com/office/drawing/2014/main" id="{C2FC0550-A5AC-4E87-89B2-7115C85435BD}"/>
+                <a16:creationId xmlns:a16="http://schemas.microsoft.com/office/drawing/2014/main" id="{DC7B9CDB-E360-4D02-A263-7E6A9A86141D}"/>
               </a:ext>
             </a:extLst>
           </p:cNvPr>
@@ -11345,7 +11545,7 @@
           <p:cNvPr id="9" name="">
             <a:extLst xmlns:a="http://schemas.openxmlformats.org/drawingml/2006/main">
               <a:ext uri="{FF2B5EF4-FFF2-40B4-BE49-F238E27FC236}">
-                <a16:creationId xmlns:a16="http://schemas.microsoft.com/office/drawing/2014/main" id="{48E32E41-CADA-4957-801B-9E336828FBF3}"/>
+                <a16:creationId xmlns:a16="http://schemas.microsoft.com/office/drawing/2014/main" id="{30905CCE-38FE-406E-8B0C-774280DD4D22}"/>
               </a:ext>
             </a:extLst>
           </p:cNvPr>
@@ -11406,7 +11606,7 @@
           <p:nvPr/>
         </p:nvPicPr>
         <p:blipFill>
-          <a:blip xmlns:r="http://schemas.openxmlformats.org/officeDocument/2006/relationships" xmlns:a="http://schemas.openxmlformats.org/drawingml/2006/main" r:embed="Ra7c6ab9d8b614914"/>
+          <a:blip xmlns:r="http://schemas.openxmlformats.org/officeDocument/2006/relationships" xmlns:a="http://schemas.openxmlformats.org/drawingml/2006/main" r:embed="Rc0a47d35f5a74dc2"/>
           <a:stretch xmlns:a="http://schemas.openxmlformats.org/drawingml/2006/main"/>
         </p:blipFill>
         <p:spPr>
@@ -11424,7 +11624,7 @@
           <p:cNvPr id="11" name="">
             <a:extLst xmlns:a="http://schemas.openxmlformats.org/drawingml/2006/main">
               <a:ext uri="{FF2B5EF4-FFF2-40B4-BE49-F238E27FC236}">
-                <a16:creationId xmlns:a16="http://schemas.microsoft.com/office/drawing/2014/main" id="{8AD67C4D-02B8-4E4B-96A4-A2149955E244}"/>
+                <a16:creationId xmlns:a16="http://schemas.microsoft.com/office/drawing/2014/main" id="{8F20FF52-B7D7-4684-9B4D-1965D5838D1B}"/>
               </a:ext>
             </a:extLst>
           </p:cNvPr>
@@ -11481,7 +11681,7 @@
           <p:cNvPr id="12" name="">
             <a:extLst xmlns:a="http://schemas.openxmlformats.org/drawingml/2006/main">
               <a:ext uri="{FF2B5EF4-FFF2-40B4-BE49-F238E27FC236}">
-                <a16:creationId xmlns:a16="http://schemas.microsoft.com/office/drawing/2014/main" id="{231F51DE-047D-44ED-B1D0-CD09E076EFDD}"/>
+                <a16:creationId xmlns:a16="http://schemas.microsoft.com/office/drawing/2014/main" id="{1B15110E-92A8-48AD-8368-F7458205F359}"/>
               </a:ext>
             </a:extLst>
           </p:cNvPr>
@@ -11538,7 +11738,7 @@
           <p:cNvPr id="13" name="">
             <a:extLst xmlns:a="http://schemas.openxmlformats.org/drawingml/2006/main">
               <a:ext uri="{FF2B5EF4-FFF2-40B4-BE49-F238E27FC236}">
-                <a16:creationId xmlns:a16="http://schemas.microsoft.com/office/drawing/2014/main" id="{F174A531-BAA8-4007-90BE-EE8ED372FBEE}"/>
+                <a16:creationId xmlns:a16="http://schemas.microsoft.com/office/drawing/2014/main" id="{6B2A79DB-5D65-40E8-87C8-F9AC79ADB71F}"/>
               </a:ext>
             </a:extLst>
           </p:cNvPr>
@@ -11570,7 +11770,7 @@
           <p:cNvPr id="14" name="">
             <a:extLst xmlns:a="http://schemas.openxmlformats.org/drawingml/2006/main">
               <a:ext uri="{FF2B5EF4-FFF2-40B4-BE49-F238E27FC236}">
-                <a16:creationId xmlns:a16="http://schemas.microsoft.com/office/drawing/2014/main" id="{6EA3322C-4E6A-4F8D-A41B-ABDB2C264B31}"/>
+                <a16:creationId xmlns:a16="http://schemas.microsoft.com/office/drawing/2014/main" id="{45CD02F9-6C74-4A82-B3C2-37D3C60D27A8}"/>
               </a:ext>
             </a:extLst>
           </p:cNvPr>
@@ -11627,7 +11827,7 @@
           <p:cNvPr id="15" name="">
             <a:extLst xmlns:a="http://schemas.openxmlformats.org/drawingml/2006/main">
               <a:ext uri="{FF2B5EF4-FFF2-40B4-BE49-F238E27FC236}">
-                <a16:creationId xmlns:a16="http://schemas.microsoft.com/office/drawing/2014/main" id="{5815EAA7-6E07-4B8B-B168-BB9858604910}"/>
+                <a16:creationId xmlns:a16="http://schemas.microsoft.com/office/drawing/2014/main" id="{E36287BA-5ABD-491E-946F-9B20DC76878E}"/>
               </a:ext>
             </a:extLst>
           </p:cNvPr>
@@ -11682,7 +11882,7 @@
     </p:spTree>
     <p:extLst>
       <p:ext uri="{BB962C8B-B14F-4D97-AF65-F5344CB8AC3E}">
-        <p14:creationId xmlns:p14="http://schemas.microsoft.com/office/powerpoint/2010/main" val="772095399"/>
+        <p14:creationId xmlns:p14="http://schemas.microsoft.com/office/powerpoint/2010/main" val="2100968693"/>
       </p:ext>
     </p:extLst>
   </p:cSld>
@@ -11837,7 +12037,7 @@
           <p:cNvPr id="23" name="">
             <a:extLst xmlns:a="http://schemas.openxmlformats.org/drawingml/2006/main">
               <a:ext uri="{FF2B5EF4-FFF2-40B4-BE49-F238E27FC236}">
-                <a16:creationId xmlns:a16="http://schemas.microsoft.com/office/drawing/2014/main" id="{80346246-C86B-46AD-9116-941F62A13A70}"/>
+                <a16:creationId xmlns:a16="http://schemas.microsoft.com/office/drawing/2014/main" id="{458DF0D5-FB71-4D5E-A5E0-ACD016BDB68E}"/>
               </a:ext>
             </a:extLst>
           </p:cNvPr>
@@ -11869,7 +12069,7 @@
           <p:cNvPr id="2" name="">
             <a:extLst xmlns:a="http://schemas.openxmlformats.org/drawingml/2006/main">
               <a:ext uri="{FF2B5EF4-FFF2-40B4-BE49-F238E27FC236}">
-                <a16:creationId xmlns:a16="http://schemas.microsoft.com/office/drawing/2014/main" id="{E1DBAF35-A61E-4022-A9BF-08EB8FEDE369}"/>
+                <a16:creationId xmlns:a16="http://schemas.microsoft.com/office/drawing/2014/main" id="{A05E5EB1-E708-4A3C-BFE7-D46970F4BCA8}"/>
               </a:ext>
             </a:extLst>
           </p:cNvPr>
@@ -11926,7 +12126,7 @@
           <p:cNvPr id="3" name="">
             <a:extLst xmlns:a="http://schemas.openxmlformats.org/drawingml/2006/main">
               <a:ext uri="{FF2B5EF4-FFF2-40B4-BE49-F238E27FC236}">
-                <a16:creationId xmlns:a16="http://schemas.microsoft.com/office/drawing/2014/main" id="{FBBAB382-4E38-4D4A-8099-4B4F7441FEB3}"/>
+                <a16:creationId xmlns:a16="http://schemas.microsoft.com/office/drawing/2014/main" id="{5D6E517D-AB97-44CE-9C60-2D194802AAA4}"/>
               </a:ext>
             </a:extLst>
           </p:cNvPr>
@@ -11958,7 +12158,7 @@
           <p:cNvPr id="4" name="">
             <a:extLst xmlns:a="http://schemas.openxmlformats.org/drawingml/2006/main">
               <a:ext uri="{FF2B5EF4-FFF2-40B4-BE49-F238E27FC236}">
-                <a16:creationId xmlns:a16="http://schemas.microsoft.com/office/drawing/2014/main" id="{0852DAA5-A73D-4E36-9141-5CDA1B883C97}"/>
+                <a16:creationId xmlns:a16="http://schemas.microsoft.com/office/drawing/2014/main" id="{598411A3-7837-4E0A-86AB-379595246CAB}"/>
               </a:ext>
             </a:extLst>
           </p:cNvPr>
@@ -12015,7 +12215,7 @@
           <p:cNvPr id="5" name="">
             <a:extLst xmlns:a="http://schemas.openxmlformats.org/drawingml/2006/main">
               <a:ext uri="{FF2B5EF4-FFF2-40B4-BE49-F238E27FC236}">
-                <a16:creationId xmlns:a16="http://schemas.microsoft.com/office/drawing/2014/main" id="{C1B1AA01-FDDA-4164-88B6-4691C49CB217}"/>
+                <a16:creationId xmlns:a16="http://schemas.microsoft.com/office/drawing/2014/main" id="{2AFD85F1-3BAC-4FF1-94B3-F7E0F15A109C}"/>
               </a:ext>
             </a:extLst>
           </p:cNvPr>
@@ -12072,7 +12272,7 @@
           <p:cNvPr id="6" name="">
             <a:extLst xmlns:a="http://schemas.openxmlformats.org/drawingml/2006/main">
               <a:ext uri="{FF2B5EF4-FFF2-40B4-BE49-F238E27FC236}">
-                <a16:creationId xmlns:a16="http://schemas.microsoft.com/office/drawing/2014/main" id="{47851FD1-A3D1-4284-B570-576239288364}"/>
+                <a16:creationId xmlns:a16="http://schemas.microsoft.com/office/drawing/2014/main" id="{01A29C6A-7289-4AF2-81EB-1F70A91AAC01}"/>
               </a:ext>
             </a:extLst>
           </p:cNvPr>
@@ -12129,7 +12329,7 @@
           <p:cNvPr id="7" name="">
             <a:extLst xmlns:a="http://schemas.openxmlformats.org/drawingml/2006/main">
               <a:ext uri="{FF2B5EF4-FFF2-40B4-BE49-F238E27FC236}">
-                <a16:creationId xmlns:a16="http://schemas.microsoft.com/office/drawing/2014/main" id="{B84AA73E-5691-4EF9-B4B9-B22B38DF6A50}"/>
+                <a16:creationId xmlns:a16="http://schemas.microsoft.com/office/drawing/2014/main" id="{8355943A-FF09-489F-A7AC-03D120D3F19D}"/>
               </a:ext>
             </a:extLst>
           </p:cNvPr>
@@ -12161,7 +12361,7 @@
           <p:cNvPr id="8" name="">
             <a:extLst xmlns:a="http://schemas.openxmlformats.org/drawingml/2006/main">
               <a:ext uri="{FF2B5EF4-FFF2-40B4-BE49-F238E27FC236}">
-                <a16:creationId xmlns:a16="http://schemas.microsoft.com/office/drawing/2014/main" id="{84C94EBA-7808-47B1-AFCB-FE67F1B7DA94}"/>
+                <a16:creationId xmlns:a16="http://schemas.microsoft.com/office/drawing/2014/main" id="{83FC94DA-0AE7-4958-A76D-F4DCB9D23E93}"/>
               </a:ext>
             </a:extLst>
           </p:cNvPr>
@@ -12218,7 +12418,7 @@
           <p:cNvPr id="9" name="">
             <a:extLst xmlns:a="http://schemas.openxmlformats.org/drawingml/2006/main">
               <a:ext uri="{FF2B5EF4-FFF2-40B4-BE49-F238E27FC236}">
-                <a16:creationId xmlns:a16="http://schemas.microsoft.com/office/drawing/2014/main" id="{3CDFAE94-D82A-429E-AA58-DE0074A9D597}"/>
+                <a16:creationId xmlns:a16="http://schemas.microsoft.com/office/drawing/2014/main" id="{A4379DF1-83F1-4BC3-AFF2-7770FEAB0015}"/>
               </a:ext>
             </a:extLst>
           </p:cNvPr>
@@ -12275,7 +12475,7 @@
           <p:cNvPr id="10" name="">
             <a:extLst xmlns:a="http://schemas.openxmlformats.org/drawingml/2006/main">
               <a:ext uri="{FF2B5EF4-FFF2-40B4-BE49-F238E27FC236}">
-                <a16:creationId xmlns:a16="http://schemas.microsoft.com/office/drawing/2014/main" id="{638D22EB-CE18-45B2-B171-201F6AC6EAF5}"/>
+                <a16:creationId xmlns:a16="http://schemas.microsoft.com/office/drawing/2014/main" id="{F976DDC8-5A11-4F29-8F8F-726D90C5AABA}"/>
               </a:ext>
             </a:extLst>
           </p:cNvPr>
@@ -12309,7 +12509,7 @@
           <p:cNvPr id="11" name="">
             <a:extLst xmlns:a="http://schemas.openxmlformats.org/drawingml/2006/main">
               <a:ext uri="{FF2B5EF4-FFF2-40B4-BE49-F238E27FC236}">
-                <a16:creationId xmlns:a16="http://schemas.microsoft.com/office/drawing/2014/main" id="{DB0802CF-D672-4A45-BC18-38CD2AA19ABA}"/>
+                <a16:creationId xmlns:a16="http://schemas.microsoft.com/office/drawing/2014/main" id="{6EB5261F-120F-4F2E-8E65-F6CEA5A225D1}"/>
               </a:ext>
             </a:extLst>
           </p:cNvPr>
@@ -12341,7 +12541,7 @@
           <p:cNvPr id="12" name="">
             <a:extLst xmlns:a="http://schemas.openxmlformats.org/drawingml/2006/main">
               <a:ext uri="{FF2B5EF4-FFF2-40B4-BE49-F238E27FC236}">
-                <a16:creationId xmlns:a16="http://schemas.microsoft.com/office/drawing/2014/main" id="{A1B46798-E631-4EAC-9B2F-B7D45E3BE8F8}"/>
+                <a16:creationId xmlns:a16="http://schemas.microsoft.com/office/drawing/2014/main" id="{5F2437CB-0892-4ED2-BA1A-6B9BF71AA346}"/>
               </a:ext>
             </a:extLst>
           </p:cNvPr>
@@ -12398,7 +12598,7 @@
           <p:cNvPr id="13" name="">
             <a:extLst xmlns:a="http://schemas.openxmlformats.org/drawingml/2006/main">
               <a:ext uri="{FF2B5EF4-FFF2-40B4-BE49-F238E27FC236}">
-                <a16:creationId xmlns:a16="http://schemas.microsoft.com/office/drawing/2014/main" id="{7A9FC9C1-D5FF-4EB4-8871-ADFDBC29A04E}"/>
+                <a16:creationId xmlns:a16="http://schemas.microsoft.com/office/drawing/2014/main" id="{78141DF0-15C1-47F8-AFF0-1B9EDE6FD268}"/>
               </a:ext>
             </a:extLst>
           </p:cNvPr>
@@ -12455,7 +12655,7 @@
           <p:cNvPr id="14" name="">
             <a:extLst xmlns:a="http://schemas.openxmlformats.org/drawingml/2006/main">
               <a:ext uri="{FF2B5EF4-FFF2-40B4-BE49-F238E27FC236}">
-                <a16:creationId xmlns:a16="http://schemas.microsoft.com/office/drawing/2014/main" id="{FF1F8877-038F-48BC-B7D2-D2943D55C3FA}"/>
+                <a16:creationId xmlns:a16="http://schemas.microsoft.com/office/drawing/2014/main" id="{F57C0F02-D09A-486C-BA58-D44DEA3CF1D2}"/>
               </a:ext>
             </a:extLst>
           </p:cNvPr>
@@ -12489,7 +12689,7 @@
           <p:cNvPr id="15" name="">
             <a:extLst xmlns:a="http://schemas.openxmlformats.org/drawingml/2006/main">
               <a:ext uri="{FF2B5EF4-FFF2-40B4-BE49-F238E27FC236}">
-                <a16:creationId xmlns:a16="http://schemas.microsoft.com/office/drawing/2014/main" id="{99AF815F-3FA9-47A3-BED8-80C5057C4CBC}"/>
+                <a16:creationId xmlns:a16="http://schemas.microsoft.com/office/drawing/2014/main" id="{A8776EEE-0C2A-49D4-995D-6D354F1B2A5E}"/>
               </a:ext>
             </a:extLst>
           </p:cNvPr>
@@ -12521,7 +12721,7 @@
           <p:cNvPr id="16" name="">
             <a:extLst xmlns:a="http://schemas.openxmlformats.org/drawingml/2006/main">
               <a:ext uri="{FF2B5EF4-FFF2-40B4-BE49-F238E27FC236}">
-                <a16:creationId xmlns:a16="http://schemas.microsoft.com/office/drawing/2014/main" id="{5317E28B-B00E-4D8F-AF3D-40C5B3767EC0}"/>
+                <a16:creationId xmlns:a16="http://schemas.microsoft.com/office/drawing/2014/main" id="{CEC85AE5-C346-4867-8808-F1EC1B624835}"/>
               </a:ext>
             </a:extLst>
           </p:cNvPr>
@@ -12578,7 +12778,7 @@
           <p:cNvPr id="17" name="">
             <a:extLst xmlns:a="http://schemas.openxmlformats.org/drawingml/2006/main">
               <a:ext uri="{FF2B5EF4-FFF2-40B4-BE49-F238E27FC236}">
-                <a16:creationId xmlns:a16="http://schemas.microsoft.com/office/drawing/2014/main" id="{C83DB176-CAEB-4B9B-9F91-B7CCFD0D693E}"/>
+                <a16:creationId xmlns:a16="http://schemas.microsoft.com/office/drawing/2014/main" id="{9B5C5B0C-31C9-4185-BF3D-51E3B8AF19CC}"/>
               </a:ext>
             </a:extLst>
           </p:cNvPr>
@@ -12635,7 +12835,7 @@
           <p:cNvPr id="18" name="">
             <a:extLst xmlns:a="http://schemas.openxmlformats.org/drawingml/2006/main">
               <a:ext uri="{FF2B5EF4-FFF2-40B4-BE49-F238E27FC236}">
-                <a16:creationId xmlns:a16="http://schemas.microsoft.com/office/drawing/2014/main" id="{5CFBBF28-0701-4629-8649-593B2BA1AC7C}"/>
+                <a16:creationId xmlns:a16="http://schemas.microsoft.com/office/drawing/2014/main" id="{87FF7CEB-BB09-4605-9292-7A9215661F67}"/>
               </a:ext>
             </a:extLst>
           </p:cNvPr>
@@ -12669,7 +12869,7 @@
           <p:cNvPr id="19" name="">
             <a:extLst xmlns:a="http://schemas.openxmlformats.org/drawingml/2006/main">
               <a:ext uri="{FF2B5EF4-FFF2-40B4-BE49-F238E27FC236}">
-                <a16:creationId xmlns:a16="http://schemas.microsoft.com/office/drawing/2014/main" id="{8CFFB741-EA6B-47D1-82F3-D84CF165DA10}"/>
+                <a16:creationId xmlns:a16="http://schemas.microsoft.com/office/drawing/2014/main" id="{0A3DEE92-303F-4EE7-857C-761031ADDA54}"/>
               </a:ext>
             </a:extLst>
           </p:cNvPr>
@@ -12701,7 +12901,7 @@
           <p:cNvPr id="20" name="">
             <a:extLst xmlns:a="http://schemas.openxmlformats.org/drawingml/2006/main">
               <a:ext uri="{FF2B5EF4-FFF2-40B4-BE49-F238E27FC236}">
-                <a16:creationId xmlns:a16="http://schemas.microsoft.com/office/drawing/2014/main" id="{64F4EC4A-D1BE-4D1B-91C2-4002B7DC30E1}"/>
+                <a16:creationId xmlns:a16="http://schemas.microsoft.com/office/drawing/2014/main" id="{45BE2AB1-B696-4EC7-A3D7-9A9C20B225C0}"/>
               </a:ext>
             </a:extLst>
           </p:cNvPr>
@@ -12758,7 +12958,7 @@
           <p:cNvPr id="21" name="">
             <a:extLst xmlns:a="http://schemas.openxmlformats.org/drawingml/2006/main">
               <a:ext uri="{FF2B5EF4-FFF2-40B4-BE49-F238E27FC236}">
-                <a16:creationId xmlns:a16="http://schemas.microsoft.com/office/drawing/2014/main" id="{99EA25F5-05C5-4698-A258-D7DD4378F17D}"/>
+                <a16:creationId xmlns:a16="http://schemas.microsoft.com/office/drawing/2014/main" id="{04F231E3-18CF-4F07-A3EA-0BE7AA748F36}"/>
               </a:ext>
             </a:extLst>
           </p:cNvPr>
@@ -12815,7 +13015,7 @@
           <p:cNvPr id="22" name="">
             <a:extLst xmlns:a="http://schemas.openxmlformats.org/drawingml/2006/main">
               <a:ext uri="{FF2B5EF4-FFF2-40B4-BE49-F238E27FC236}">
-                <a16:creationId xmlns:a16="http://schemas.microsoft.com/office/drawing/2014/main" id="{8BD4580D-F554-4026-A09F-7F5DA196AEB3}"/>
+                <a16:creationId xmlns:a16="http://schemas.microsoft.com/office/drawing/2014/main" id="{6EDFCF78-62F4-4C91-9A35-36B238478A0F}"/>
               </a:ext>
             </a:extLst>
           </p:cNvPr>
@@ -12870,7 +13070,7 @@
     </p:spTree>
     <p:extLst>
       <p:ext uri="{BB962C8B-B14F-4D97-AF65-F5344CB8AC3E}">
-        <p14:creationId xmlns:p14="http://schemas.microsoft.com/office/powerpoint/2010/main" val="2041076783"/>
+        <p14:creationId xmlns:p14="http://schemas.microsoft.com/office/powerpoint/2010/main" val="990022305"/>
       </p:ext>
     </p:extLst>
   </p:cSld>
@@ -13071,7 +13271,7 @@
           <p:cNvPr id="22" name="">
             <a:extLst xmlns:a="http://schemas.openxmlformats.org/drawingml/2006/main">
               <a:ext uri="{FF2B5EF4-FFF2-40B4-BE49-F238E27FC236}">
-                <a16:creationId xmlns:a16="http://schemas.microsoft.com/office/drawing/2014/main" id="{EABF8590-D135-4AD1-B156-B67E4DA94199}"/>
+                <a16:creationId xmlns:a16="http://schemas.microsoft.com/office/drawing/2014/main" id="{1D647C64-DAC0-46E6-962B-213FEDBA701D}"/>
               </a:ext>
             </a:extLst>
           </p:cNvPr>
@@ -13103,7 +13303,7 @@
           <p:cNvPr id="2" name="">
             <a:extLst xmlns:a="http://schemas.openxmlformats.org/drawingml/2006/main">
               <a:ext uri="{FF2B5EF4-FFF2-40B4-BE49-F238E27FC236}">
-                <a16:creationId xmlns:a16="http://schemas.microsoft.com/office/drawing/2014/main" id="{67C43308-E701-41C3-BF51-235AB4F771C2}"/>
+                <a16:creationId xmlns:a16="http://schemas.microsoft.com/office/drawing/2014/main" id="{8EFB55A5-6A86-45C1-8C9D-A0744CCE952D}"/>
               </a:ext>
             </a:extLst>
           </p:cNvPr>
@@ -13160,7 +13360,7 @@
           <p:cNvPr id="3" name="">
             <a:extLst xmlns:a="http://schemas.openxmlformats.org/drawingml/2006/main">
               <a:ext uri="{FF2B5EF4-FFF2-40B4-BE49-F238E27FC236}">
-                <a16:creationId xmlns:a16="http://schemas.microsoft.com/office/drawing/2014/main" id="{B17F92BA-82DB-45CF-B676-61F958BA6B08}"/>
+                <a16:creationId xmlns:a16="http://schemas.microsoft.com/office/drawing/2014/main" id="{3A8BBE05-C56F-4375-9F37-3FDE9B3897AE}"/>
               </a:ext>
             </a:extLst>
           </p:cNvPr>
@@ -13192,7 +13392,7 @@
           <p:cNvPr id="4" name="">
             <a:extLst xmlns:a="http://schemas.openxmlformats.org/drawingml/2006/main">
               <a:ext uri="{FF2B5EF4-FFF2-40B4-BE49-F238E27FC236}">
-                <a16:creationId xmlns:a16="http://schemas.microsoft.com/office/drawing/2014/main" id="{C6D4A509-D268-4296-AEB7-35B884219122}"/>
+                <a16:creationId xmlns:a16="http://schemas.microsoft.com/office/drawing/2014/main" id="{E348047B-278E-450D-9D16-A7BA2F35B016}"/>
               </a:ext>
             </a:extLst>
           </p:cNvPr>
@@ -13249,7 +13449,7 @@
           <p:cNvPr id="5" name="">
             <a:extLst xmlns:a="http://schemas.openxmlformats.org/drawingml/2006/main">
               <a:ext uri="{FF2B5EF4-FFF2-40B4-BE49-F238E27FC236}">
-                <a16:creationId xmlns:a16="http://schemas.microsoft.com/office/drawing/2014/main" id="{85B16FB6-9DBB-45CD-A860-172884000A9E}"/>
+                <a16:creationId xmlns:a16="http://schemas.microsoft.com/office/drawing/2014/main" id="{8EBCF17E-048E-4581-8539-75401DC32715}"/>
               </a:ext>
             </a:extLst>
           </p:cNvPr>
@@ -13306,7 +13506,7 @@
           <p:cNvPr id="6" name="">
             <a:extLst xmlns:a="http://schemas.openxmlformats.org/drawingml/2006/main">
               <a:ext uri="{FF2B5EF4-FFF2-40B4-BE49-F238E27FC236}">
-                <a16:creationId xmlns:a16="http://schemas.microsoft.com/office/drawing/2014/main" id="{E1DB0BD7-CCAC-400D-A37F-69B2C2C063BE}"/>
+                <a16:creationId xmlns:a16="http://schemas.microsoft.com/office/drawing/2014/main" id="{744B9E35-FC1B-46A0-AAEC-121E72BF227E}"/>
               </a:ext>
             </a:extLst>
           </p:cNvPr>
@@ -13363,7 +13563,7 @@
           <p:cNvPr id="7" name="">
             <a:extLst xmlns:a="http://schemas.openxmlformats.org/drawingml/2006/main">
               <a:ext uri="{FF2B5EF4-FFF2-40B4-BE49-F238E27FC236}">
-                <a16:creationId xmlns:a16="http://schemas.microsoft.com/office/drawing/2014/main" id="{A8492D77-8B63-4C99-9A62-EF72AFF6A69E}"/>
+                <a16:creationId xmlns:a16="http://schemas.microsoft.com/office/drawing/2014/main" id="{0F1CFD5D-724E-4026-89E7-8B2E883869CB}"/>
               </a:ext>
             </a:extLst>
           </p:cNvPr>
@@ -13395,7 +13595,7 @@
           <p:cNvPr id="8" name="">
             <a:extLst xmlns:a="http://schemas.openxmlformats.org/drawingml/2006/main">
               <a:ext uri="{FF2B5EF4-FFF2-40B4-BE49-F238E27FC236}">
-                <a16:creationId xmlns:a16="http://schemas.microsoft.com/office/drawing/2014/main" id="{9E1D9052-4830-473F-ACAF-A0BA3F48317A}"/>
+                <a16:creationId xmlns:a16="http://schemas.microsoft.com/office/drawing/2014/main" id="{3EE396FC-254C-4BE1-A384-06D5DA3E8E6A}"/>
               </a:ext>
             </a:extLst>
           </p:cNvPr>
@@ -13452,7 +13652,7 @@
           <p:cNvPr id="9" name="">
             <a:extLst xmlns:a="http://schemas.openxmlformats.org/drawingml/2006/main">
               <a:ext uri="{FF2B5EF4-FFF2-40B4-BE49-F238E27FC236}">
-                <a16:creationId xmlns:a16="http://schemas.microsoft.com/office/drawing/2014/main" id="{7DB74BDF-4351-4DC3-A9B7-BD0DD446BF5B}"/>
+                <a16:creationId xmlns:a16="http://schemas.microsoft.com/office/drawing/2014/main" id="{7E706C14-8C40-4294-9230-8925ADAC4CA3}"/>
               </a:ext>
             </a:extLst>
           </p:cNvPr>
@@ -13509,7 +13709,7 @@
           <p:cNvPr id="10" name="">
             <a:extLst xmlns:a="http://schemas.openxmlformats.org/drawingml/2006/main">
               <a:ext uri="{FF2B5EF4-FFF2-40B4-BE49-F238E27FC236}">
-                <a16:creationId xmlns:a16="http://schemas.microsoft.com/office/drawing/2014/main" id="{C750E156-DBBB-47D1-A9C4-658D9E793212}"/>
+                <a16:creationId xmlns:a16="http://schemas.microsoft.com/office/drawing/2014/main" id="{DD64D379-8BF5-471B-B9A7-973C636AF8BA}"/>
               </a:ext>
             </a:extLst>
           </p:cNvPr>
@@ -13543,7 +13743,7 @@
           <p:cNvPr id="11" name="">
             <a:extLst xmlns:a="http://schemas.openxmlformats.org/drawingml/2006/main">
               <a:ext uri="{FF2B5EF4-FFF2-40B4-BE49-F238E27FC236}">
-                <a16:creationId xmlns:a16="http://schemas.microsoft.com/office/drawing/2014/main" id="{94883A94-3669-4BEB-8BBD-068FDBF7E31B}"/>
+                <a16:creationId xmlns:a16="http://schemas.microsoft.com/office/drawing/2014/main" id="{8A7609E1-DC64-4817-B4E9-278E8DC4519B}"/>
               </a:ext>
             </a:extLst>
           </p:cNvPr>
@@ -13575,7 +13775,7 @@
           <p:cNvPr id="12" name="">
             <a:extLst xmlns:a="http://schemas.openxmlformats.org/drawingml/2006/main">
               <a:ext uri="{FF2B5EF4-FFF2-40B4-BE49-F238E27FC236}">
-                <a16:creationId xmlns:a16="http://schemas.microsoft.com/office/drawing/2014/main" id="{0881B092-8C60-427C-AE6C-AA3360A396D3}"/>
+                <a16:creationId xmlns:a16="http://schemas.microsoft.com/office/drawing/2014/main" id="{D13691DE-4BB9-4350-860B-D357CCFBBEF8}"/>
               </a:ext>
             </a:extLst>
           </p:cNvPr>
@@ -13632,7 +13832,7 @@
           <p:cNvPr id="13" name="">
             <a:extLst xmlns:a="http://schemas.openxmlformats.org/drawingml/2006/main">
               <a:ext uri="{FF2B5EF4-FFF2-40B4-BE49-F238E27FC236}">
-                <a16:creationId xmlns:a16="http://schemas.microsoft.com/office/drawing/2014/main" id="{7F9C08C4-134F-4184-9326-16D1479B3FA7}"/>
+                <a16:creationId xmlns:a16="http://schemas.microsoft.com/office/drawing/2014/main" id="{1AE63F8A-AC7F-4281-8024-2B1BD95C0789}"/>
               </a:ext>
             </a:extLst>
           </p:cNvPr>
@@ -13689,7 +13889,7 @@
           <p:cNvPr id="14" name="">
             <a:extLst xmlns:a="http://schemas.openxmlformats.org/drawingml/2006/main">
               <a:ext uri="{FF2B5EF4-FFF2-40B4-BE49-F238E27FC236}">
-                <a16:creationId xmlns:a16="http://schemas.microsoft.com/office/drawing/2014/main" id="{D8BD4E90-5DF4-4455-8956-3EF25788E533}"/>
+                <a16:creationId xmlns:a16="http://schemas.microsoft.com/office/drawing/2014/main" id="{4C8BB249-4E7C-4AFD-ABDD-170F9B56464F}"/>
               </a:ext>
             </a:extLst>
           </p:cNvPr>
@@ -13723,7 +13923,7 @@
           <p:cNvPr id="15" name="">
             <a:extLst xmlns:a="http://schemas.openxmlformats.org/drawingml/2006/main">
               <a:ext uri="{FF2B5EF4-FFF2-40B4-BE49-F238E27FC236}">
-                <a16:creationId xmlns:a16="http://schemas.microsoft.com/office/drawing/2014/main" id="{50227C15-BDE0-4EA2-8A94-F58A35F3176E}"/>
+                <a16:creationId xmlns:a16="http://schemas.microsoft.com/office/drawing/2014/main" id="{0CF6E7DA-A77F-4747-B454-9F64DF0488F0}"/>
               </a:ext>
             </a:extLst>
           </p:cNvPr>
@@ -13755,7 +13955,7 @@
           <p:cNvPr id="16" name="">
             <a:extLst xmlns:a="http://schemas.openxmlformats.org/drawingml/2006/main">
               <a:ext uri="{FF2B5EF4-FFF2-40B4-BE49-F238E27FC236}">
-                <a16:creationId xmlns:a16="http://schemas.microsoft.com/office/drawing/2014/main" id="{11C09C73-E665-4F7D-9DA7-5F2169D7EC6B}"/>
+                <a16:creationId xmlns:a16="http://schemas.microsoft.com/office/drawing/2014/main" id="{0B2F3760-8F0A-43E9-88FF-8D48B4B6FC30}"/>
               </a:ext>
             </a:extLst>
           </p:cNvPr>
@@ -13812,7 +14012,7 @@
           <p:cNvPr id="17" name="">
             <a:extLst xmlns:a="http://schemas.openxmlformats.org/drawingml/2006/main">
               <a:ext uri="{FF2B5EF4-FFF2-40B4-BE49-F238E27FC236}">
-                <a16:creationId xmlns:a16="http://schemas.microsoft.com/office/drawing/2014/main" id="{8950F564-C1D7-437D-BC20-61DA32A36752}"/>
+                <a16:creationId xmlns:a16="http://schemas.microsoft.com/office/drawing/2014/main" id="{ED6E9BAA-5953-4484-A98C-E8CEE9062F81}"/>
               </a:ext>
             </a:extLst>
           </p:cNvPr>
@@ -13869,7 +14069,7 @@
           <p:cNvPr id="18" name="">
             <a:extLst xmlns:a="http://schemas.openxmlformats.org/drawingml/2006/main">
               <a:ext uri="{FF2B5EF4-FFF2-40B4-BE49-F238E27FC236}">
-                <a16:creationId xmlns:a16="http://schemas.microsoft.com/office/drawing/2014/main" id="{0CC843AF-5C90-4D7B-9470-63BDA059D59E}"/>
+                <a16:creationId xmlns:a16="http://schemas.microsoft.com/office/drawing/2014/main" id="{ACEA5E7B-7C7D-4B91-8CE5-90F2C2D744D1}"/>
               </a:ext>
             </a:extLst>
           </p:cNvPr>
@@ -13903,7 +14103,7 @@
           <p:cNvPr id="19" name="">
             <a:extLst xmlns:a="http://schemas.openxmlformats.org/drawingml/2006/main">
               <a:ext uri="{FF2B5EF4-FFF2-40B4-BE49-F238E27FC236}">
-                <a16:creationId xmlns:a16="http://schemas.microsoft.com/office/drawing/2014/main" id="{283AFECA-9523-4337-9668-6A64FAB7CEEB}"/>
+                <a16:creationId xmlns:a16="http://schemas.microsoft.com/office/drawing/2014/main" id="{2D295EEB-5CBC-40F7-A12E-DC3202513BBB}"/>
               </a:ext>
             </a:extLst>
           </p:cNvPr>
@@ -13935,7 +14135,7 @@
           <p:cNvPr id="20" name="">
             <a:extLst xmlns:a="http://schemas.openxmlformats.org/drawingml/2006/main">
               <a:ext uri="{FF2B5EF4-FFF2-40B4-BE49-F238E27FC236}">
-                <a16:creationId xmlns:a16="http://schemas.microsoft.com/office/drawing/2014/main" id="{4AC8E306-6A4A-41D4-9CCE-DDACE152E50D}"/>
+                <a16:creationId xmlns:a16="http://schemas.microsoft.com/office/drawing/2014/main" id="{61178C8D-815A-4C9F-97EE-D56629B47D33}"/>
               </a:ext>
             </a:extLst>
           </p:cNvPr>
@@ -13992,7 +14192,7 @@
           <p:cNvPr id="21" name="">
             <a:extLst xmlns:a="http://schemas.openxmlformats.org/drawingml/2006/main">
               <a:ext uri="{FF2B5EF4-FFF2-40B4-BE49-F238E27FC236}">
-                <a16:creationId xmlns:a16="http://schemas.microsoft.com/office/drawing/2014/main" id="{9389DF25-B890-469D-BEAD-234226341AE3}"/>
+                <a16:creationId xmlns:a16="http://schemas.microsoft.com/office/drawing/2014/main" id="{5E0C88D1-51AB-470E-BD6E-CF7FADEC436F}"/>
               </a:ext>
             </a:extLst>
           </p:cNvPr>
@@ -14047,7 +14247,7 @@
     </p:spTree>
     <p:extLst>
       <p:ext uri="{BB962C8B-B14F-4D97-AF65-F5344CB8AC3E}">
-        <p14:creationId xmlns:p14="http://schemas.microsoft.com/office/powerpoint/2010/main" val="1686737765"/>
+        <p14:creationId xmlns:p14="http://schemas.microsoft.com/office/powerpoint/2010/main" val="1530420281"/>
       </p:ext>
     </p:extLst>
   </p:cSld>
